--- a/courses/z2005/00-oop-then-algorithms/lecture-3.pptx
+++ b/courses/z2005/00-oop-then-algorithms/lecture-3.pptx
@@ -15,6 +15,10 @@
     <p:sldId id="263" r:id="rId9"/>
     <p:sldId id="264" r:id="rId10"/>
     <p:sldId id="265" r:id="rId11"/>
+    <p:sldId id="266" r:id="rId12"/>
+    <p:sldId id="267" r:id="rId13"/>
+    <p:sldId id="268" r:id="rId14"/>
+    <p:sldId id="269" r:id="rId15"/>
   </p:sldIdLst>
   <p:sldSz cx="9144000" cy="5143500" type="screen16x9"/>
   <p:notesSz cx="6858000" cy="9144000"/>
@@ -3207,7 +3211,333 @@
             </a:pPr>
             <a:r>
               <a:rPr/>
-              <a:t>Before next lecture</a:t>
+              <a:t>MTech addition — duck typing and ABCs</a:t>
+            </a:r>
+          </a:p>
+        </p:txBody>
+      </p:sp>
+      <p:sp>
+        <p:nvSpPr>
+          <p:cNvPr id="3" name="Content Placeholder 2"/>
+          <p:cNvSpPr>
+            <a:spLocks noGrp="1"/>
+          </p:cNvSpPr>
+          <p:nvPr>
+            <p:ph idx="1"/>
+          </p:nvPr>
+        </p:nvSpPr>
+        <p:spPr/>
+        <p:txBody>
+          <a:bodyPr/>
+          <a:lstStyle/>
+          <a:p>
+            <a:pPr lvl="0" indent="0">
+              <a:buNone/>
+            </a:pPr>
+            <a:r>
+              <a:rPr b="1">
+                <a:solidFill>
+                  <a:srgbClr val="008000"/>
+                </a:solidFill>
+                <a:latin typeface="Courier"/>
+              </a:rPr>
+              <a:t>from</a:t>
+            </a:r>
+            <a:r>
+              <a:rPr>
+                <a:latin typeface="Courier"/>
+              </a:rPr>
+              <a:t> abc </a:t>
+            </a:r>
+            <a:r>
+              <a:rPr b="1">
+                <a:solidFill>
+                  <a:srgbClr val="008000"/>
+                </a:solidFill>
+                <a:latin typeface="Courier"/>
+              </a:rPr>
+              <a:t>import</a:t>
+            </a:r>
+            <a:r>
+              <a:rPr>
+                <a:latin typeface="Courier"/>
+              </a:rPr>
+              <a:t> ABC, abstractmethod</a:t>
+            </a:r>
+            <a:br/>
+            <a:br/>
+            <a:r>
+              <a:rPr b="1">
+                <a:solidFill>
+                  <a:srgbClr val="007020"/>
+                </a:solidFill>
+                <a:latin typeface="Courier"/>
+              </a:rPr>
+              <a:t>class</a:t>
+            </a:r>
+            <a:r>
+              <a:rPr>
+                <a:latin typeface="Courier"/>
+              </a:rPr>
+              <a:t> Shape(ABC):</a:t>
+            </a:r>
+            <a:br/>
+            <a:r>
+              <a:rPr>
+                <a:latin typeface="Courier"/>
+              </a:rPr>
+              <a:t>    </a:t>
+            </a:r>
+            <a:r>
+              <a:rPr>
+                <a:solidFill>
+                  <a:srgbClr val="7D9029"/>
+                </a:solidFill>
+                <a:latin typeface="Courier"/>
+              </a:rPr>
+              <a:t>@abstractmethod</a:t>
+            </a:r>
+            <a:br/>
+            <a:r>
+              <a:rPr>
+                <a:latin typeface="Courier"/>
+              </a:rPr>
+              <a:t>    </a:t>
+            </a:r>
+            <a:r>
+              <a:rPr b="1">
+                <a:solidFill>
+                  <a:srgbClr val="007020"/>
+                </a:solidFill>
+                <a:latin typeface="Courier"/>
+              </a:rPr>
+              <a:t>def</a:t>
+            </a:r>
+            <a:r>
+              <a:rPr>
+                <a:latin typeface="Courier"/>
+              </a:rPr>
+              <a:t> area(</a:t>
+            </a:r>
+            <a:r>
+              <a:rPr>
+                <a:solidFill>
+                  <a:srgbClr val="19177C"/>
+                </a:solidFill>
+                <a:latin typeface="Courier"/>
+              </a:rPr>
+              <a:t>self</a:t>
+            </a:r>
+            <a:r>
+              <a:rPr>
+                <a:latin typeface="Courier"/>
+              </a:rPr>
+              <a:t>): ...</a:t>
+            </a:r>
+            <a:br/>
+            <a:br/>
+            <a:r>
+              <a:rPr>
+                <a:latin typeface="Courier"/>
+              </a:rPr>
+              <a:t>Shape()          </a:t>
+            </a:r>
+            <a:r>
+              <a:rPr i="1">
+                <a:solidFill>
+                  <a:srgbClr val="60A0B0"/>
+                </a:solidFill>
+                <a:latin typeface="Courier"/>
+              </a:rPr>
+              <a:t># TypeError: can't instantiate abstract class Shape</a:t>
+            </a:r>
+          </a:p>
+        </p:txBody>
+      </p:sp>
+    </p:spTree>
+  </p:cSld>
+</p:sld>
+</file>
+
+<file path=ppt/slides/slide11.xml><?xml version="1.0" encoding="utf-8"?>
+<p:sld xmlns:a="http://schemas.openxmlformats.org/drawingml/2006/main" xmlns:r="http://schemas.openxmlformats.org/officeDocument/2006/relationships" xmlns:p="http://schemas.openxmlformats.org/presentationml/2006/main">
+  <p:cSld>
+    <p:spTree>
+      <p:nvGrpSpPr>
+        <p:cNvPr id="1" name=""/>
+        <p:cNvGrpSpPr/>
+        <p:nvPr/>
+      </p:nvGrpSpPr>
+      <p:grpSpPr>
+        <a:xfrm>
+          <a:off x="0" y="0"/>
+          <a:ext cx="0" cy="0"/>
+          <a:chOff x="0" y="0"/>
+          <a:chExt cx="0" cy="0"/>
+        </a:xfrm>
+      </p:grpSpPr>
+      <p:sp>
+        <p:nvSpPr>
+          <p:cNvPr id="2" name="Title 1"/>
+          <p:cNvSpPr>
+            <a:spLocks noGrp="1"/>
+          </p:cNvSpPr>
+          <p:nvPr>
+            <p:ph type="title"/>
+          </p:nvPr>
+        </p:nvSpPr>
+        <p:spPr/>
+        <p:txBody>
+          <a:bodyPr/>
+          <a:lstStyle/>
+          <a:p>
+            <a:pPr lvl="0" indent="0" marL="0">
+              <a:buNone/>
+            </a:pPr>
+            <a:r>
+              <a:rPr/>
+              <a:t>Exercise</a:t>
+            </a:r>
+          </a:p>
+        </p:txBody>
+      </p:sp>
+    </p:spTree>
+  </p:cSld>
+</p:sld>
+</file>
+
+<file path=ppt/slides/slide12.xml><?xml version="1.0" encoding="utf-8"?>
+<p:sld xmlns:a="http://schemas.openxmlformats.org/drawingml/2006/main" xmlns:r="http://schemas.openxmlformats.org/officeDocument/2006/relationships" xmlns:p="http://schemas.openxmlformats.org/presentationml/2006/main">
+  <p:cSld>
+    <p:spTree>
+      <p:nvGrpSpPr>
+        <p:cNvPr id="1" name=""/>
+        <p:cNvGrpSpPr/>
+        <p:nvPr/>
+      </p:nvGrpSpPr>
+      <p:grpSpPr>
+        <a:xfrm>
+          <a:off x="0" y="0"/>
+          <a:ext cx="0" cy="0"/>
+          <a:chOff x="0" y="0"/>
+          <a:chExt cx="0" cy="0"/>
+        </a:xfrm>
+      </p:grpSpPr>
+      <p:sp>
+        <p:nvSpPr>
+          <p:cNvPr id="2" name="Title 1"/>
+          <p:cNvSpPr>
+            <a:spLocks noGrp="1"/>
+          </p:cNvSpPr>
+          <p:nvPr>
+            <p:ph type="title"/>
+          </p:nvPr>
+        </p:nvSpPr>
+        <p:spPr/>
+        <p:txBody>
+          <a:bodyPr/>
+          <a:lstStyle/>
+          <a:p>
+            <a:pPr lvl="0" indent="0" marL="0">
+              <a:buNone/>
+            </a:pPr>
+            <a:r>
+              <a:rPr/>
+              <a:t>Quiz — is-a or has-a?</a:t>
+            </a:r>
+          </a:p>
+        </p:txBody>
+      </p:sp>
+    </p:spTree>
+  </p:cSld>
+</p:sld>
+</file>
+
+<file path=ppt/slides/slide13.xml><?xml version="1.0" encoding="utf-8"?>
+<p:sld xmlns:a="http://schemas.openxmlformats.org/drawingml/2006/main" xmlns:r="http://schemas.openxmlformats.org/officeDocument/2006/relationships" xmlns:p="http://schemas.openxmlformats.org/presentationml/2006/main">
+  <p:cSld>
+    <p:spTree>
+      <p:nvGrpSpPr>
+        <p:cNvPr id="1" name=""/>
+        <p:cNvGrpSpPr/>
+        <p:nvPr/>
+      </p:nvGrpSpPr>
+      <p:grpSpPr>
+        <a:xfrm>
+          <a:off x="0" y="0"/>
+          <a:ext cx="0" cy="0"/>
+          <a:chOff x="0" y="0"/>
+          <a:chExt cx="0" cy="0"/>
+        </a:xfrm>
+      </p:grpSpPr>
+      <p:sp>
+        <p:nvSpPr>
+          <p:cNvPr id="2" name="Title 1"/>
+          <p:cNvSpPr>
+            <a:spLocks noGrp="1"/>
+          </p:cNvSpPr>
+          <p:nvPr>
+            <p:ph type="title"/>
+          </p:nvPr>
+        </p:nvSpPr>
+        <p:spPr/>
+        <p:txBody>
+          <a:bodyPr/>
+          <a:lstStyle/>
+          <a:p>
+            <a:pPr lvl="0" indent="0" marL="0">
+              <a:buNone/>
+            </a:pPr>
+            <a:r>
+              <a:rPr/>
+              <a:t>Quiz — answers</a:t>
+            </a:r>
+          </a:p>
+        </p:txBody>
+      </p:sp>
+    </p:spTree>
+  </p:cSld>
+</p:sld>
+</file>
+
+<file path=ppt/slides/slide14.xml><?xml version="1.0" encoding="utf-8"?>
+<p:sld xmlns:a="http://schemas.openxmlformats.org/drawingml/2006/main" xmlns:r="http://schemas.openxmlformats.org/officeDocument/2006/relationships" xmlns:p="http://schemas.openxmlformats.org/presentationml/2006/main">
+  <p:cSld>
+    <p:spTree>
+      <p:nvGrpSpPr>
+        <p:cNvPr id="1" name=""/>
+        <p:cNvGrpSpPr/>
+        <p:nvPr/>
+      </p:nvGrpSpPr>
+      <p:grpSpPr>
+        <a:xfrm>
+          <a:off x="0" y="0"/>
+          <a:ext cx="0" cy="0"/>
+          <a:chOff x="0" y="0"/>
+          <a:chExt cx="0" cy="0"/>
+        </a:xfrm>
+      </p:grpSpPr>
+      <p:sp>
+        <p:nvSpPr>
+          <p:cNvPr id="2" name="Title 1"/>
+          <p:cNvSpPr>
+            <a:spLocks noGrp="1"/>
+          </p:cNvSpPr>
+          <p:nvPr>
+            <p:ph type="title"/>
+          </p:nvPr>
+        </p:nvSpPr>
+        <p:spPr/>
+        <p:txBody>
+          <a:bodyPr/>
+          <a:lstStyle/>
+          <a:p>
+            <a:pPr lvl="0" indent="0" marL="0">
+              <a:buNone/>
+            </a:pPr>
+            <a:r>
+              <a:rPr/>
+              <a:t>Summary</a:t>
             </a:r>
           </a:p>
         </p:txBody>
@@ -3254,464 +3584,7 @@
             </a:pPr>
             <a:r>
               <a:rPr/>
-              <a:t>The repetition problem</a:t>
-            </a:r>
-          </a:p>
-        </p:txBody>
-      </p:sp>
-      <p:sp>
-        <p:nvSpPr>
-          <p:cNvPr id="3" name="Content Placeholder 2"/>
-          <p:cNvSpPr>
-            <a:spLocks noGrp="1"/>
-          </p:cNvSpPr>
-          <p:nvPr>
-            <p:ph idx="1"/>
-          </p:nvPr>
-        </p:nvSpPr>
-        <p:spPr/>
-        <p:txBody>
-          <a:bodyPr/>
-          <a:lstStyle/>
-          <a:p>
-            <a:pPr lvl="0" indent="0">
-              <a:buNone/>
-            </a:pPr>
-            <a:r>
-              <a:rPr b="1">
-                <a:solidFill>
-                  <a:srgbClr val="007020"/>
-                </a:solidFill>
-                <a:latin typeface="Courier"/>
-              </a:rPr>
-              <a:t>class</a:t>
-            </a:r>
-            <a:r>
-              <a:rPr>
-                <a:latin typeface="Courier"/>
-              </a:rPr>
-              <a:t> Circle:</a:t>
-            </a:r>
-            <a:br/>
-            <a:r>
-              <a:rPr>
-                <a:latin typeface="Courier"/>
-              </a:rPr>
-              <a:t>    </a:t>
-            </a:r>
-            <a:r>
-              <a:rPr b="1">
-                <a:solidFill>
-                  <a:srgbClr val="007020"/>
-                </a:solidFill>
-                <a:latin typeface="Courier"/>
-              </a:rPr>
-              <a:t>def</a:t>
-            </a:r>
-            <a:r>
-              <a:rPr>
-                <a:latin typeface="Courier"/>
-              </a:rPr>
-              <a:t> </a:t>
-            </a:r>
-            <a:r>
-              <a:rPr>
-                <a:solidFill>
-                  <a:srgbClr val="06287E"/>
-                </a:solidFill>
-                <a:latin typeface="Courier"/>
-              </a:rPr>
-              <a:t>__init__</a:t>
-            </a:r>
-            <a:r>
-              <a:rPr>
-                <a:latin typeface="Courier"/>
-              </a:rPr>
-              <a:t>(</a:t>
-            </a:r>
-            <a:r>
-              <a:rPr>
-                <a:solidFill>
-                  <a:srgbClr val="19177C"/>
-                </a:solidFill>
-                <a:latin typeface="Courier"/>
-              </a:rPr>
-              <a:t>self</a:t>
-            </a:r>
-            <a:r>
-              <a:rPr>
-                <a:latin typeface="Courier"/>
-              </a:rPr>
-              <a:t>, r):</a:t>
-            </a:r>
-            <a:br/>
-            <a:r>
-              <a:rPr>
-                <a:latin typeface="Courier"/>
-              </a:rPr>
-              <a:t>        </a:t>
-            </a:r>
-            <a:r>
-              <a:rPr>
-                <a:solidFill>
-                  <a:srgbClr val="19177C"/>
-                </a:solidFill>
-                <a:latin typeface="Courier"/>
-              </a:rPr>
-              <a:t>self</a:t>
-            </a:r>
-            <a:r>
-              <a:rPr>
-                <a:latin typeface="Courier"/>
-              </a:rPr>
-              <a:t>.r </a:t>
-            </a:r>
-            <a:r>
-              <a:rPr>
-                <a:solidFill>
-                  <a:srgbClr val="666666"/>
-                </a:solidFill>
-                <a:latin typeface="Courier"/>
-              </a:rPr>
-              <a:t>=</a:t>
-            </a:r>
-            <a:r>
-              <a:rPr>
-                <a:latin typeface="Courier"/>
-              </a:rPr>
-              <a:t> r</a:t>
-            </a:r>
-            <a:br/>
-            <a:r>
-              <a:rPr>
-                <a:latin typeface="Courier"/>
-              </a:rPr>
-              <a:t>    </a:t>
-            </a:r>
-            <a:r>
-              <a:rPr b="1">
-                <a:solidFill>
-                  <a:srgbClr val="007020"/>
-                </a:solidFill>
-                <a:latin typeface="Courier"/>
-              </a:rPr>
-              <a:t>def</a:t>
-            </a:r>
-            <a:r>
-              <a:rPr>
-                <a:latin typeface="Courier"/>
-              </a:rPr>
-              <a:t> area(</a:t>
-            </a:r>
-            <a:r>
-              <a:rPr>
-                <a:solidFill>
-                  <a:srgbClr val="19177C"/>
-                </a:solidFill>
-                <a:latin typeface="Courier"/>
-              </a:rPr>
-              <a:t>self</a:t>
-            </a:r>
-            <a:r>
-              <a:rPr>
-                <a:latin typeface="Courier"/>
-              </a:rPr>
-              <a:t>):</a:t>
-            </a:r>
-            <a:br/>
-            <a:r>
-              <a:rPr>
-                <a:latin typeface="Courier"/>
-              </a:rPr>
-              <a:t>        </a:t>
-            </a:r>
-            <a:r>
-              <a:rPr b="1">
-                <a:solidFill>
-                  <a:srgbClr val="007020"/>
-                </a:solidFill>
-                <a:latin typeface="Courier"/>
-              </a:rPr>
-              <a:t>return</a:t>
-            </a:r>
-            <a:r>
-              <a:rPr>
-                <a:latin typeface="Courier"/>
-              </a:rPr>
-              <a:t> </a:t>
-            </a:r>
-            <a:r>
-              <a:rPr>
-                <a:solidFill>
-                  <a:srgbClr val="40A070"/>
-                </a:solidFill>
-                <a:latin typeface="Courier"/>
-              </a:rPr>
-              <a:t>3.14159</a:t>
-            </a:r>
-            <a:r>
-              <a:rPr>
-                <a:latin typeface="Courier"/>
-              </a:rPr>
-              <a:t> </a:t>
-            </a:r>
-            <a:r>
-              <a:rPr>
-                <a:solidFill>
-                  <a:srgbClr val="666666"/>
-                </a:solidFill>
-                <a:latin typeface="Courier"/>
-              </a:rPr>
-              <a:t>*</a:t>
-            </a:r>
-            <a:r>
-              <a:rPr>
-                <a:latin typeface="Courier"/>
-              </a:rPr>
-              <a:t> </a:t>
-            </a:r>
-            <a:r>
-              <a:rPr>
-                <a:solidFill>
-                  <a:srgbClr val="19177C"/>
-                </a:solidFill>
-                <a:latin typeface="Courier"/>
-              </a:rPr>
-              <a:t>self</a:t>
-            </a:r>
-            <a:r>
-              <a:rPr>
-                <a:latin typeface="Courier"/>
-              </a:rPr>
-              <a:t>.r </a:t>
-            </a:r>
-            <a:r>
-              <a:rPr>
-                <a:solidFill>
-                  <a:srgbClr val="666666"/>
-                </a:solidFill>
-                <a:latin typeface="Courier"/>
-              </a:rPr>
-              <a:t>**</a:t>
-            </a:r>
-            <a:r>
-              <a:rPr>
-                <a:latin typeface="Courier"/>
-              </a:rPr>
-              <a:t> </a:t>
-            </a:r>
-            <a:r>
-              <a:rPr>
-                <a:solidFill>
-                  <a:srgbClr val="40A070"/>
-                </a:solidFill>
-                <a:latin typeface="Courier"/>
-              </a:rPr>
-              <a:t>2</a:t>
-            </a:r>
-            <a:br/>
-            <a:br/>
-            <a:r>
-              <a:rPr b="1">
-                <a:solidFill>
-                  <a:srgbClr val="007020"/>
-                </a:solidFill>
-                <a:latin typeface="Courier"/>
-              </a:rPr>
-              <a:t>class</a:t>
-            </a:r>
-            <a:r>
-              <a:rPr>
-                <a:latin typeface="Courier"/>
-              </a:rPr>
-              <a:t> Square:</a:t>
-            </a:r>
-            <a:br/>
-            <a:r>
-              <a:rPr>
-                <a:latin typeface="Courier"/>
-              </a:rPr>
-              <a:t>    </a:t>
-            </a:r>
-            <a:r>
-              <a:rPr b="1">
-                <a:solidFill>
-                  <a:srgbClr val="007020"/>
-                </a:solidFill>
-                <a:latin typeface="Courier"/>
-              </a:rPr>
-              <a:t>def</a:t>
-            </a:r>
-            <a:r>
-              <a:rPr>
-                <a:latin typeface="Courier"/>
-              </a:rPr>
-              <a:t> </a:t>
-            </a:r>
-            <a:r>
-              <a:rPr>
-                <a:solidFill>
-                  <a:srgbClr val="06287E"/>
-                </a:solidFill>
-                <a:latin typeface="Courier"/>
-              </a:rPr>
-              <a:t>__init__</a:t>
-            </a:r>
-            <a:r>
-              <a:rPr>
-                <a:latin typeface="Courier"/>
-              </a:rPr>
-              <a:t>(</a:t>
-            </a:r>
-            <a:r>
-              <a:rPr>
-                <a:solidFill>
-                  <a:srgbClr val="19177C"/>
-                </a:solidFill>
-                <a:latin typeface="Courier"/>
-              </a:rPr>
-              <a:t>self</a:t>
-            </a:r>
-            <a:r>
-              <a:rPr>
-                <a:latin typeface="Courier"/>
-              </a:rPr>
-              <a:t>, s):</a:t>
-            </a:r>
-            <a:br/>
-            <a:r>
-              <a:rPr>
-                <a:latin typeface="Courier"/>
-              </a:rPr>
-              <a:t>        </a:t>
-            </a:r>
-            <a:r>
-              <a:rPr>
-                <a:solidFill>
-                  <a:srgbClr val="19177C"/>
-                </a:solidFill>
-                <a:latin typeface="Courier"/>
-              </a:rPr>
-              <a:t>self</a:t>
-            </a:r>
-            <a:r>
-              <a:rPr>
-                <a:latin typeface="Courier"/>
-              </a:rPr>
-              <a:t>.s </a:t>
-            </a:r>
-            <a:r>
-              <a:rPr>
-                <a:solidFill>
-                  <a:srgbClr val="666666"/>
-                </a:solidFill>
-                <a:latin typeface="Courier"/>
-              </a:rPr>
-              <a:t>=</a:t>
-            </a:r>
-            <a:r>
-              <a:rPr>
-                <a:latin typeface="Courier"/>
-              </a:rPr>
-              <a:t> s</a:t>
-            </a:r>
-            <a:br/>
-            <a:r>
-              <a:rPr>
-                <a:latin typeface="Courier"/>
-              </a:rPr>
-              <a:t>    </a:t>
-            </a:r>
-            <a:r>
-              <a:rPr b="1">
-                <a:solidFill>
-                  <a:srgbClr val="007020"/>
-                </a:solidFill>
-                <a:latin typeface="Courier"/>
-              </a:rPr>
-              <a:t>def</a:t>
-            </a:r>
-            <a:r>
-              <a:rPr>
-                <a:latin typeface="Courier"/>
-              </a:rPr>
-              <a:t> area(</a:t>
-            </a:r>
-            <a:r>
-              <a:rPr>
-                <a:solidFill>
-                  <a:srgbClr val="19177C"/>
-                </a:solidFill>
-                <a:latin typeface="Courier"/>
-              </a:rPr>
-              <a:t>self</a:t>
-            </a:r>
-            <a:r>
-              <a:rPr>
-                <a:latin typeface="Courier"/>
-              </a:rPr>
-              <a:t>):</a:t>
-            </a:r>
-            <a:br/>
-            <a:r>
-              <a:rPr>
-                <a:latin typeface="Courier"/>
-              </a:rPr>
-              <a:t>        </a:t>
-            </a:r>
-            <a:r>
-              <a:rPr b="1">
-                <a:solidFill>
-                  <a:srgbClr val="007020"/>
-                </a:solidFill>
-                <a:latin typeface="Courier"/>
-              </a:rPr>
-              <a:t>return</a:t>
-            </a:r>
-            <a:r>
-              <a:rPr>
-                <a:latin typeface="Courier"/>
-              </a:rPr>
-              <a:t> </a:t>
-            </a:r>
-            <a:r>
-              <a:rPr>
-                <a:solidFill>
-                  <a:srgbClr val="19177C"/>
-                </a:solidFill>
-                <a:latin typeface="Courier"/>
-              </a:rPr>
-              <a:t>self</a:t>
-            </a:r>
-            <a:r>
-              <a:rPr>
-                <a:latin typeface="Courier"/>
-              </a:rPr>
-              <a:t>.s </a:t>
-            </a:r>
-            <a:r>
-              <a:rPr>
-                <a:solidFill>
-                  <a:srgbClr val="666666"/>
-                </a:solidFill>
-                <a:latin typeface="Courier"/>
-              </a:rPr>
-              <a:t>**</a:t>
-            </a:r>
-            <a:r>
-              <a:rPr>
-                <a:latin typeface="Courier"/>
-              </a:rPr>
-              <a:t> </a:t>
-            </a:r>
-            <a:r>
-              <a:rPr>
-                <a:solidFill>
-                  <a:srgbClr val="40A070"/>
-                </a:solidFill>
-                <a:latin typeface="Courier"/>
-              </a:rPr>
-              <a:t>2</a:t>
+              <a:t>Objectives</a:t>
             </a:r>
           </a:p>
         </p:txBody>
@@ -3758,582 +3631,7 @@
             </a:pPr>
             <a:r>
               <a:rPr/>
-              <a:t>Inheritance: naming the relationship</a:t>
-            </a:r>
-          </a:p>
-        </p:txBody>
-      </p:sp>
-      <p:sp>
-        <p:nvSpPr>
-          <p:cNvPr id="3" name="Content Placeholder 2"/>
-          <p:cNvSpPr>
-            <a:spLocks noGrp="1"/>
-          </p:cNvSpPr>
-          <p:nvPr>
-            <p:ph idx="1"/>
-          </p:nvPr>
-        </p:nvSpPr>
-        <p:spPr/>
-        <p:txBody>
-          <a:bodyPr/>
-          <a:lstStyle/>
-          <a:p>
-            <a:pPr lvl="0" indent="0">
-              <a:buNone/>
-            </a:pPr>
-            <a:r>
-              <a:rPr b="1">
-                <a:solidFill>
-                  <a:srgbClr val="007020"/>
-                </a:solidFill>
-                <a:latin typeface="Courier"/>
-              </a:rPr>
-              <a:t>class</a:t>
-            </a:r>
-            <a:r>
-              <a:rPr>
-                <a:latin typeface="Courier"/>
-              </a:rPr>
-              <a:t> Shape:</a:t>
-            </a:r>
-            <a:br/>
-            <a:r>
-              <a:rPr>
-                <a:latin typeface="Courier"/>
-              </a:rPr>
-              <a:t>    </a:t>
-            </a:r>
-            <a:r>
-              <a:rPr b="1">
-                <a:solidFill>
-                  <a:srgbClr val="007020"/>
-                </a:solidFill>
-                <a:latin typeface="Courier"/>
-              </a:rPr>
-              <a:t>def</a:t>
-            </a:r>
-            <a:r>
-              <a:rPr>
-                <a:latin typeface="Courier"/>
-              </a:rPr>
-              <a:t> area(</a:t>
-            </a:r>
-            <a:r>
-              <a:rPr>
-                <a:solidFill>
-                  <a:srgbClr val="19177C"/>
-                </a:solidFill>
-                <a:latin typeface="Courier"/>
-              </a:rPr>
-              <a:t>self</a:t>
-            </a:r>
-            <a:r>
-              <a:rPr>
-                <a:latin typeface="Courier"/>
-              </a:rPr>
-              <a:t>):</a:t>
-            </a:r>
-            <a:br/>
-            <a:r>
-              <a:rPr>
-                <a:latin typeface="Courier"/>
-              </a:rPr>
-              <a:t>        </a:t>
-            </a:r>
-            <a:r>
-              <a:rPr b="1">
-                <a:solidFill>
-                  <a:srgbClr val="007020"/>
-                </a:solidFill>
-                <a:latin typeface="Courier"/>
-              </a:rPr>
-              <a:t>raise</a:t>
-            </a:r>
-            <a:r>
-              <a:rPr>
-                <a:latin typeface="Courier"/>
-              </a:rPr>
-              <a:t> </a:t>
-            </a:r>
-            <a:r>
-              <a:rPr>
-                <a:solidFill>
-                  <a:srgbClr val="BC7A00"/>
-                </a:solidFill>
-                <a:latin typeface="Courier"/>
-              </a:rPr>
-              <a:t>NotImplementedError</a:t>
-            </a:r>
-            <a:r>
-              <a:rPr>
-                <a:latin typeface="Courier"/>
-              </a:rPr>
-              <a:t>   </a:t>
-            </a:r>
-            <a:r>
-              <a:rPr i="1">
-                <a:solidFill>
-                  <a:srgbClr val="60A0B0"/>
-                </a:solidFill>
-                <a:latin typeface="Courier"/>
-              </a:rPr>
-              <a:t># forces every subclass to override this</a:t>
-            </a:r>
-            <a:br/>
-            <a:br/>
-            <a:r>
-              <a:rPr b="1">
-                <a:solidFill>
-                  <a:srgbClr val="007020"/>
-                </a:solidFill>
-                <a:latin typeface="Courier"/>
-              </a:rPr>
-              <a:t>class</a:t>
-            </a:r>
-            <a:r>
-              <a:rPr>
-                <a:latin typeface="Courier"/>
-              </a:rPr>
-              <a:t> Circle(Shape):                </a:t>
-            </a:r>
-            <a:r>
-              <a:rPr i="1">
-                <a:solidFill>
-                  <a:srgbClr val="60A0B0"/>
-                </a:solidFill>
-                <a:latin typeface="Courier"/>
-              </a:rPr>
-              <a:t># Circle IS-A Shape</a:t>
-            </a:r>
-            <a:br/>
-            <a:r>
-              <a:rPr>
-                <a:latin typeface="Courier"/>
-              </a:rPr>
-              <a:t>    </a:t>
-            </a:r>
-            <a:r>
-              <a:rPr b="1">
-                <a:solidFill>
-                  <a:srgbClr val="007020"/>
-                </a:solidFill>
-                <a:latin typeface="Courier"/>
-              </a:rPr>
-              <a:t>def</a:t>
-            </a:r>
-            <a:r>
-              <a:rPr>
-                <a:latin typeface="Courier"/>
-              </a:rPr>
-              <a:t> </a:t>
-            </a:r>
-            <a:r>
-              <a:rPr>
-                <a:solidFill>
-                  <a:srgbClr val="06287E"/>
-                </a:solidFill>
-                <a:latin typeface="Courier"/>
-              </a:rPr>
-              <a:t>__init__</a:t>
-            </a:r>
-            <a:r>
-              <a:rPr>
-                <a:latin typeface="Courier"/>
-              </a:rPr>
-              <a:t>(</a:t>
-            </a:r>
-            <a:r>
-              <a:rPr>
-                <a:solidFill>
-                  <a:srgbClr val="19177C"/>
-                </a:solidFill>
-                <a:latin typeface="Courier"/>
-              </a:rPr>
-              <a:t>self</a:t>
-            </a:r>
-            <a:r>
-              <a:rPr>
-                <a:latin typeface="Courier"/>
-              </a:rPr>
-              <a:t>, r):</a:t>
-            </a:r>
-            <a:br/>
-            <a:r>
-              <a:rPr>
-                <a:latin typeface="Courier"/>
-              </a:rPr>
-              <a:t>        </a:t>
-            </a:r>
-            <a:r>
-              <a:rPr>
-                <a:solidFill>
-                  <a:srgbClr val="19177C"/>
-                </a:solidFill>
-                <a:latin typeface="Courier"/>
-              </a:rPr>
-              <a:t>self</a:t>
-            </a:r>
-            <a:r>
-              <a:rPr>
-                <a:latin typeface="Courier"/>
-              </a:rPr>
-              <a:t>.r </a:t>
-            </a:r>
-            <a:r>
-              <a:rPr>
-                <a:solidFill>
-                  <a:srgbClr val="666666"/>
-                </a:solidFill>
-                <a:latin typeface="Courier"/>
-              </a:rPr>
-              <a:t>=</a:t>
-            </a:r>
-            <a:r>
-              <a:rPr>
-                <a:latin typeface="Courier"/>
-              </a:rPr>
-              <a:t> r</a:t>
-            </a:r>
-            <a:br/>
-            <a:r>
-              <a:rPr>
-                <a:latin typeface="Courier"/>
-              </a:rPr>
-              <a:t>    </a:t>
-            </a:r>
-            <a:r>
-              <a:rPr b="1">
-                <a:solidFill>
-                  <a:srgbClr val="007020"/>
-                </a:solidFill>
-                <a:latin typeface="Courier"/>
-              </a:rPr>
-              <a:t>def</a:t>
-            </a:r>
-            <a:r>
-              <a:rPr>
-                <a:latin typeface="Courier"/>
-              </a:rPr>
-              <a:t> area(</a:t>
-            </a:r>
-            <a:r>
-              <a:rPr>
-                <a:solidFill>
-                  <a:srgbClr val="19177C"/>
-                </a:solidFill>
-                <a:latin typeface="Courier"/>
-              </a:rPr>
-              <a:t>self</a:t>
-            </a:r>
-            <a:r>
-              <a:rPr>
-                <a:latin typeface="Courier"/>
-              </a:rPr>
-              <a:t>):</a:t>
-            </a:r>
-            <a:br/>
-            <a:r>
-              <a:rPr>
-                <a:latin typeface="Courier"/>
-              </a:rPr>
-              <a:t>        </a:t>
-            </a:r>
-            <a:r>
-              <a:rPr b="1">
-                <a:solidFill>
-                  <a:srgbClr val="007020"/>
-                </a:solidFill>
-                <a:latin typeface="Courier"/>
-              </a:rPr>
-              <a:t>return</a:t>
-            </a:r>
-            <a:r>
-              <a:rPr>
-                <a:latin typeface="Courier"/>
-              </a:rPr>
-              <a:t> </a:t>
-            </a:r>
-            <a:r>
-              <a:rPr>
-                <a:solidFill>
-                  <a:srgbClr val="40A070"/>
-                </a:solidFill>
-                <a:latin typeface="Courier"/>
-              </a:rPr>
-              <a:t>3.14159</a:t>
-            </a:r>
-            <a:r>
-              <a:rPr>
-                <a:latin typeface="Courier"/>
-              </a:rPr>
-              <a:t> </a:t>
-            </a:r>
-            <a:r>
-              <a:rPr>
-                <a:solidFill>
-                  <a:srgbClr val="666666"/>
-                </a:solidFill>
-                <a:latin typeface="Courier"/>
-              </a:rPr>
-              <a:t>*</a:t>
-            </a:r>
-            <a:r>
-              <a:rPr>
-                <a:latin typeface="Courier"/>
-              </a:rPr>
-              <a:t> </a:t>
-            </a:r>
-            <a:r>
-              <a:rPr>
-                <a:solidFill>
-                  <a:srgbClr val="19177C"/>
-                </a:solidFill>
-                <a:latin typeface="Courier"/>
-              </a:rPr>
-              <a:t>self</a:t>
-            </a:r>
-            <a:r>
-              <a:rPr>
-                <a:latin typeface="Courier"/>
-              </a:rPr>
-              <a:t>.r </a:t>
-            </a:r>
-            <a:r>
-              <a:rPr>
-                <a:solidFill>
-                  <a:srgbClr val="666666"/>
-                </a:solidFill>
-                <a:latin typeface="Courier"/>
-              </a:rPr>
-              <a:t>**</a:t>
-            </a:r>
-            <a:r>
-              <a:rPr>
-                <a:latin typeface="Courier"/>
-              </a:rPr>
-              <a:t> </a:t>
-            </a:r>
-            <a:r>
-              <a:rPr>
-                <a:solidFill>
-                  <a:srgbClr val="40A070"/>
-                </a:solidFill>
-                <a:latin typeface="Courier"/>
-              </a:rPr>
-              <a:t>2</a:t>
-            </a:r>
-            <a:br/>
-            <a:br/>
-            <a:r>
-              <a:rPr b="1">
-                <a:solidFill>
-                  <a:srgbClr val="007020"/>
-                </a:solidFill>
-                <a:latin typeface="Courier"/>
-              </a:rPr>
-              <a:t>class</a:t>
-            </a:r>
-            <a:r>
-              <a:rPr>
-                <a:latin typeface="Courier"/>
-              </a:rPr>
-              <a:t> Square(Shape):                </a:t>
-            </a:r>
-            <a:r>
-              <a:rPr i="1">
-                <a:solidFill>
-                  <a:srgbClr val="60A0B0"/>
-                </a:solidFill>
-                <a:latin typeface="Courier"/>
-              </a:rPr>
-              <a:t># Square IS-A Shape</a:t>
-            </a:r>
-            <a:br/>
-            <a:r>
-              <a:rPr>
-                <a:latin typeface="Courier"/>
-              </a:rPr>
-              <a:t>    </a:t>
-            </a:r>
-            <a:r>
-              <a:rPr b="1">
-                <a:solidFill>
-                  <a:srgbClr val="007020"/>
-                </a:solidFill>
-                <a:latin typeface="Courier"/>
-              </a:rPr>
-              <a:t>def</a:t>
-            </a:r>
-            <a:r>
-              <a:rPr>
-                <a:latin typeface="Courier"/>
-              </a:rPr>
-              <a:t> </a:t>
-            </a:r>
-            <a:r>
-              <a:rPr>
-                <a:solidFill>
-                  <a:srgbClr val="06287E"/>
-                </a:solidFill>
-                <a:latin typeface="Courier"/>
-              </a:rPr>
-              <a:t>__init__</a:t>
-            </a:r>
-            <a:r>
-              <a:rPr>
-                <a:latin typeface="Courier"/>
-              </a:rPr>
-              <a:t>(</a:t>
-            </a:r>
-            <a:r>
-              <a:rPr>
-                <a:solidFill>
-                  <a:srgbClr val="19177C"/>
-                </a:solidFill>
-                <a:latin typeface="Courier"/>
-              </a:rPr>
-              <a:t>self</a:t>
-            </a:r>
-            <a:r>
-              <a:rPr>
-                <a:latin typeface="Courier"/>
-              </a:rPr>
-              <a:t>, s):</a:t>
-            </a:r>
-            <a:br/>
-            <a:r>
-              <a:rPr>
-                <a:latin typeface="Courier"/>
-              </a:rPr>
-              <a:t>        </a:t>
-            </a:r>
-            <a:r>
-              <a:rPr>
-                <a:solidFill>
-                  <a:srgbClr val="19177C"/>
-                </a:solidFill>
-                <a:latin typeface="Courier"/>
-              </a:rPr>
-              <a:t>self</a:t>
-            </a:r>
-            <a:r>
-              <a:rPr>
-                <a:latin typeface="Courier"/>
-              </a:rPr>
-              <a:t>.s </a:t>
-            </a:r>
-            <a:r>
-              <a:rPr>
-                <a:solidFill>
-                  <a:srgbClr val="666666"/>
-                </a:solidFill>
-                <a:latin typeface="Courier"/>
-              </a:rPr>
-              <a:t>=</a:t>
-            </a:r>
-            <a:r>
-              <a:rPr>
-                <a:latin typeface="Courier"/>
-              </a:rPr>
-              <a:t> s</a:t>
-            </a:r>
-            <a:br/>
-            <a:r>
-              <a:rPr>
-                <a:latin typeface="Courier"/>
-              </a:rPr>
-              <a:t>    </a:t>
-            </a:r>
-            <a:r>
-              <a:rPr b="1">
-                <a:solidFill>
-                  <a:srgbClr val="007020"/>
-                </a:solidFill>
-                <a:latin typeface="Courier"/>
-              </a:rPr>
-              <a:t>def</a:t>
-            </a:r>
-            <a:r>
-              <a:rPr>
-                <a:latin typeface="Courier"/>
-              </a:rPr>
-              <a:t> area(</a:t>
-            </a:r>
-            <a:r>
-              <a:rPr>
-                <a:solidFill>
-                  <a:srgbClr val="19177C"/>
-                </a:solidFill>
-                <a:latin typeface="Courier"/>
-              </a:rPr>
-              <a:t>self</a:t>
-            </a:r>
-            <a:r>
-              <a:rPr>
-                <a:latin typeface="Courier"/>
-              </a:rPr>
-              <a:t>):</a:t>
-            </a:r>
-            <a:br/>
-            <a:r>
-              <a:rPr>
-                <a:latin typeface="Courier"/>
-              </a:rPr>
-              <a:t>        </a:t>
-            </a:r>
-            <a:r>
-              <a:rPr b="1">
-                <a:solidFill>
-                  <a:srgbClr val="007020"/>
-                </a:solidFill>
-                <a:latin typeface="Courier"/>
-              </a:rPr>
-              <a:t>return</a:t>
-            </a:r>
-            <a:r>
-              <a:rPr>
-                <a:latin typeface="Courier"/>
-              </a:rPr>
-              <a:t> </a:t>
-            </a:r>
-            <a:r>
-              <a:rPr>
-                <a:solidFill>
-                  <a:srgbClr val="19177C"/>
-                </a:solidFill>
-                <a:latin typeface="Courier"/>
-              </a:rPr>
-              <a:t>self</a:t>
-            </a:r>
-            <a:r>
-              <a:rPr>
-                <a:latin typeface="Courier"/>
-              </a:rPr>
-              <a:t>.s </a:t>
-            </a:r>
-            <a:r>
-              <a:rPr>
-                <a:solidFill>
-                  <a:srgbClr val="666666"/>
-                </a:solidFill>
-                <a:latin typeface="Courier"/>
-              </a:rPr>
-              <a:t>**</a:t>
-            </a:r>
-            <a:r>
-              <a:rPr>
-                <a:latin typeface="Courier"/>
-              </a:rPr>
-              <a:t> </a:t>
-            </a:r>
-            <a:r>
-              <a:rPr>
-                <a:solidFill>
-                  <a:srgbClr val="40A070"/>
-                </a:solidFill>
-                <a:latin typeface="Courier"/>
-              </a:rPr>
-              <a:t>2</a:t>
+              <a:t>Outline</a:t>
             </a:r>
           </a:p>
         </p:txBody>
@@ -4344,6 +3642,1132 @@
 </file>
 
 <file path=ppt/slides/slide4.xml><?xml version="1.0" encoding="utf-8"?>
+<p:sld xmlns:a="http://schemas.openxmlformats.org/drawingml/2006/main" xmlns:r="http://schemas.openxmlformats.org/officeDocument/2006/relationships" xmlns:p="http://schemas.openxmlformats.org/presentationml/2006/main">
+  <p:cSld>
+    <p:spTree>
+      <p:nvGrpSpPr>
+        <p:cNvPr id="1" name=""/>
+        <p:cNvGrpSpPr/>
+        <p:nvPr/>
+      </p:nvGrpSpPr>
+      <p:grpSpPr>
+        <a:xfrm>
+          <a:off x="0" y="0"/>
+          <a:ext cx="0" cy="0"/>
+          <a:chOff x="0" y="0"/>
+          <a:chExt cx="0" cy="0"/>
+        </a:xfrm>
+      </p:grpSpPr>
+      <p:sp>
+        <p:nvSpPr>
+          <p:cNvPr id="2" name="Title 1"/>
+          <p:cNvSpPr>
+            <a:spLocks noGrp="1"/>
+          </p:cNvSpPr>
+          <p:nvPr>
+            <p:ph type="title"/>
+          </p:nvPr>
+        </p:nvSpPr>
+        <p:spPr/>
+        <p:txBody>
+          <a:bodyPr/>
+          <a:lstStyle/>
+          <a:p>
+            <a:pPr lvl="0" indent="0" marL="0">
+              <a:buNone/>
+            </a:pPr>
+            <a:r>
+              <a:rPr/>
+              <a:t>The repetition problem</a:t>
+            </a:r>
+          </a:p>
+        </p:txBody>
+      </p:sp>
+      <p:sp>
+        <p:nvSpPr>
+          <p:cNvPr id="3" name="Content Placeholder 2"/>
+          <p:cNvSpPr>
+            <a:spLocks noGrp="1"/>
+          </p:cNvSpPr>
+          <p:nvPr>
+            <p:ph idx="1"/>
+          </p:nvPr>
+        </p:nvSpPr>
+        <p:spPr/>
+        <p:txBody>
+          <a:bodyPr/>
+          <a:lstStyle/>
+          <a:p>
+            <a:pPr lvl="0" indent="0">
+              <a:buNone/>
+            </a:pPr>
+            <a:r>
+              <a:rPr b="1">
+                <a:solidFill>
+                  <a:srgbClr val="007020"/>
+                </a:solidFill>
+                <a:latin typeface="Courier"/>
+              </a:rPr>
+              <a:t>class</a:t>
+            </a:r>
+            <a:r>
+              <a:rPr>
+                <a:latin typeface="Courier"/>
+              </a:rPr>
+              <a:t> Circle:</a:t>
+            </a:r>
+            <a:br/>
+            <a:r>
+              <a:rPr>
+                <a:latin typeface="Courier"/>
+              </a:rPr>
+              <a:t>    </a:t>
+            </a:r>
+            <a:r>
+              <a:rPr b="1">
+                <a:solidFill>
+                  <a:srgbClr val="007020"/>
+                </a:solidFill>
+                <a:latin typeface="Courier"/>
+              </a:rPr>
+              <a:t>def</a:t>
+            </a:r>
+            <a:r>
+              <a:rPr>
+                <a:latin typeface="Courier"/>
+              </a:rPr>
+              <a:t> </a:t>
+            </a:r>
+            <a:r>
+              <a:rPr>
+                <a:solidFill>
+                  <a:srgbClr val="06287E"/>
+                </a:solidFill>
+                <a:latin typeface="Courier"/>
+              </a:rPr>
+              <a:t>__init__</a:t>
+            </a:r>
+            <a:r>
+              <a:rPr>
+                <a:latin typeface="Courier"/>
+              </a:rPr>
+              <a:t>(</a:t>
+            </a:r>
+            <a:r>
+              <a:rPr>
+                <a:solidFill>
+                  <a:srgbClr val="19177C"/>
+                </a:solidFill>
+                <a:latin typeface="Courier"/>
+              </a:rPr>
+              <a:t>self</a:t>
+            </a:r>
+            <a:r>
+              <a:rPr>
+                <a:latin typeface="Courier"/>
+              </a:rPr>
+              <a:t>, r):</a:t>
+            </a:r>
+            <a:br/>
+            <a:r>
+              <a:rPr>
+                <a:latin typeface="Courier"/>
+              </a:rPr>
+              <a:t>        </a:t>
+            </a:r>
+            <a:r>
+              <a:rPr>
+                <a:solidFill>
+                  <a:srgbClr val="19177C"/>
+                </a:solidFill>
+                <a:latin typeface="Courier"/>
+              </a:rPr>
+              <a:t>self</a:t>
+            </a:r>
+            <a:r>
+              <a:rPr>
+                <a:latin typeface="Courier"/>
+              </a:rPr>
+              <a:t>.r </a:t>
+            </a:r>
+            <a:r>
+              <a:rPr>
+                <a:solidFill>
+                  <a:srgbClr val="666666"/>
+                </a:solidFill>
+                <a:latin typeface="Courier"/>
+              </a:rPr>
+              <a:t>=</a:t>
+            </a:r>
+            <a:r>
+              <a:rPr>
+                <a:latin typeface="Courier"/>
+              </a:rPr>
+              <a:t> r</a:t>
+            </a:r>
+            <a:br/>
+            <a:r>
+              <a:rPr>
+                <a:latin typeface="Courier"/>
+              </a:rPr>
+              <a:t>    </a:t>
+            </a:r>
+            <a:r>
+              <a:rPr b="1">
+                <a:solidFill>
+                  <a:srgbClr val="007020"/>
+                </a:solidFill>
+                <a:latin typeface="Courier"/>
+              </a:rPr>
+              <a:t>def</a:t>
+            </a:r>
+            <a:r>
+              <a:rPr>
+                <a:latin typeface="Courier"/>
+              </a:rPr>
+              <a:t> area(</a:t>
+            </a:r>
+            <a:r>
+              <a:rPr>
+                <a:solidFill>
+                  <a:srgbClr val="19177C"/>
+                </a:solidFill>
+                <a:latin typeface="Courier"/>
+              </a:rPr>
+              <a:t>self</a:t>
+            </a:r>
+            <a:r>
+              <a:rPr>
+                <a:latin typeface="Courier"/>
+              </a:rPr>
+              <a:t>):</a:t>
+            </a:r>
+            <a:br/>
+            <a:r>
+              <a:rPr>
+                <a:latin typeface="Courier"/>
+              </a:rPr>
+              <a:t>        </a:t>
+            </a:r>
+            <a:r>
+              <a:rPr b="1">
+                <a:solidFill>
+                  <a:srgbClr val="007020"/>
+                </a:solidFill>
+                <a:latin typeface="Courier"/>
+              </a:rPr>
+              <a:t>return</a:t>
+            </a:r>
+            <a:r>
+              <a:rPr>
+                <a:latin typeface="Courier"/>
+              </a:rPr>
+              <a:t> </a:t>
+            </a:r>
+            <a:r>
+              <a:rPr>
+                <a:solidFill>
+                  <a:srgbClr val="40A070"/>
+                </a:solidFill>
+                <a:latin typeface="Courier"/>
+              </a:rPr>
+              <a:t>3.14159</a:t>
+            </a:r>
+            <a:r>
+              <a:rPr>
+                <a:latin typeface="Courier"/>
+              </a:rPr>
+              <a:t> </a:t>
+            </a:r>
+            <a:r>
+              <a:rPr>
+                <a:solidFill>
+                  <a:srgbClr val="666666"/>
+                </a:solidFill>
+                <a:latin typeface="Courier"/>
+              </a:rPr>
+              <a:t>*</a:t>
+            </a:r>
+            <a:r>
+              <a:rPr>
+                <a:latin typeface="Courier"/>
+              </a:rPr>
+              <a:t> </a:t>
+            </a:r>
+            <a:r>
+              <a:rPr>
+                <a:solidFill>
+                  <a:srgbClr val="19177C"/>
+                </a:solidFill>
+                <a:latin typeface="Courier"/>
+              </a:rPr>
+              <a:t>self</a:t>
+            </a:r>
+            <a:r>
+              <a:rPr>
+                <a:latin typeface="Courier"/>
+              </a:rPr>
+              <a:t>.r </a:t>
+            </a:r>
+            <a:r>
+              <a:rPr>
+                <a:solidFill>
+                  <a:srgbClr val="666666"/>
+                </a:solidFill>
+                <a:latin typeface="Courier"/>
+              </a:rPr>
+              <a:t>**</a:t>
+            </a:r>
+            <a:r>
+              <a:rPr>
+                <a:latin typeface="Courier"/>
+              </a:rPr>
+              <a:t> </a:t>
+            </a:r>
+            <a:r>
+              <a:rPr>
+                <a:solidFill>
+                  <a:srgbClr val="40A070"/>
+                </a:solidFill>
+                <a:latin typeface="Courier"/>
+              </a:rPr>
+              <a:t>2</a:t>
+            </a:r>
+            <a:br/>
+            <a:br/>
+            <a:r>
+              <a:rPr b="1">
+                <a:solidFill>
+                  <a:srgbClr val="007020"/>
+                </a:solidFill>
+                <a:latin typeface="Courier"/>
+              </a:rPr>
+              <a:t>class</a:t>
+            </a:r>
+            <a:r>
+              <a:rPr>
+                <a:latin typeface="Courier"/>
+              </a:rPr>
+              <a:t> Square:</a:t>
+            </a:r>
+            <a:br/>
+            <a:r>
+              <a:rPr>
+                <a:latin typeface="Courier"/>
+              </a:rPr>
+              <a:t>    </a:t>
+            </a:r>
+            <a:r>
+              <a:rPr b="1">
+                <a:solidFill>
+                  <a:srgbClr val="007020"/>
+                </a:solidFill>
+                <a:latin typeface="Courier"/>
+              </a:rPr>
+              <a:t>def</a:t>
+            </a:r>
+            <a:r>
+              <a:rPr>
+                <a:latin typeface="Courier"/>
+              </a:rPr>
+              <a:t> </a:t>
+            </a:r>
+            <a:r>
+              <a:rPr>
+                <a:solidFill>
+                  <a:srgbClr val="06287E"/>
+                </a:solidFill>
+                <a:latin typeface="Courier"/>
+              </a:rPr>
+              <a:t>__init__</a:t>
+            </a:r>
+            <a:r>
+              <a:rPr>
+                <a:latin typeface="Courier"/>
+              </a:rPr>
+              <a:t>(</a:t>
+            </a:r>
+            <a:r>
+              <a:rPr>
+                <a:solidFill>
+                  <a:srgbClr val="19177C"/>
+                </a:solidFill>
+                <a:latin typeface="Courier"/>
+              </a:rPr>
+              <a:t>self</a:t>
+            </a:r>
+            <a:r>
+              <a:rPr>
+                <a:latin typeface="Courier"/>
+              </a:rPr>
+              <a:t>, s):</a:t>
+            </a:r>
+            <a:br/>
+            <a:r>
+              <a:rPr>
+                <a:latin typeface="Courier"/>
+              </a:rPr>
+              <a:t>        </a:t>
+            </a:r>
+            <a:r>
+              <a:rPr>
+                <a:solidFill>
+                  <a:srgbClr val="19177C"/>
+                </a:solidFill>
+                <a:latin typeface="Courier"/>
+              </a:rPr>
+              <a:t>self</a:t>
+            </a:r>
+            <a:r>
+              <a:rPr>
+                <a:latin typeface="Courier"/>
+              </a:rPr>
+              <a:t>.s </a:t>
+            </a:r>
+            <a:r>
+              <a:rPr>
+                <a:solidFill>
+                  <a:srgbClr val="666666"/>
+                </a:solidFill>
+                <a:latin typeface="Courier"/>
+              </a:rPr>
+              <a:t>=</a:t>
+            </a:r>
+            <a:r>
+              <a:rPr>
+                <a:latin typeface="Courier"/>
+              </a:rPr>
+              <a:t> s</a:t>
+            </a:r>
+            <a:br/>
+            <a:r>
+              <a:rPr>
+                <a:latin typeface="Courier"/>
+              </a:rPr>
+              <a:t>    </a:t>
+            </a:r>
+            <a:r>
+              <a:rPr b="1">
+                <a:solidFill>
+                  <a:srgbClr val="007020"/>
+                </a:solidFill>
+                <a:latin typeface="Courier"/>
+              </a:rPr>
+              <a:t>def</a:t>
+            </a:r>
+            <a:r>
+              <a:rPr>
+                <a:latin typeface="Courier"/>
+              </a:rPr>
+              <a:t> area(</a:t>
+            </a:r>
+            <a:r>
+              <a:rPr>
+                <a:solidFill>
+                  <a:srgbClr val="19177C"/>
+                </a:solidFill>
+                <a:latin typeface="Courier"/>
+              </a:rPr>
+              <a:t>self</a:t>
+            </a:r>
+            <a:r>
+              <a:rPr>
+                <a:latin typeface="Courier"/>
+              </a:rPr>
+              <a:t>):</a:t>
+            </a:r>
+            <a:br/>
+            <a:r>
+              <a:rPr>
+                <a:latin typeface="Courier"/>
+              </a:rPr>
+              <a:t>        </a:t>
+            </a:r>
+            <a:r>
+              <a:rPr b="1">
+                <a:solidFill>
+                  <a:srgbClr val="007020"/>
+                </a:solidFill>
+                <a:latin typeface="Courier"/>
+              </a:rPr>
+              <a:t>return</a:t>
+            </a:r>
+            <a:r>
+              <a:rPr>
+                <a:latin typeface="Courier"/>
+              </a:rPr>
+              <a:t> </a:t>
+            </a:r>
+            <a:r>
+              <a:rPr>
+                <a:solidFill>
+                  <a:srgbClr val="19177C"/>
+                </a:solidFill>
+                <a:latin typeface="Courier"/>
+              </a:rPr>
+              <a:t>self</a:t>
+            </a:r>
+            <a:r>
+              <a:rPr>
+                <a:latin typeface="Courier"/>
+              </a:rPr>
+              <a:t>.s </a:t>
+            </a:r>
+            <a:r>
+              <a:rPr>
+                <a:solidFill>
+                  <a:srgbClr val="666666"/>
+                </a:solidFill>
+                <a:latin typeface="Courier"/>
+              </a:rPr>
+              <a:t>**</a:t>
+            </a:r>
+            <a:r>
+              <a:rPr>
+                <a:latin typeface="Courier"/>
+              </a:rPr>
+              <a:t> </a:t>
+            </a:r>
+            <a:r>
+              <a:rPr>
+                <a:solidFill>
+                  <a:srgbClr val="40A070"/>
+                </a:solidFill>
+                <a:latin typeface="Courier"/>
+              </a:rPr>
+              <a:t>2</a:t>
+            </a:r>
+          </a:p>
+        </p:txBody>
+      </p:sp>
+    </p:spTree>
+  </p:cSld>
+</p:sld>
+</file>
+
+<file path=ppt/slides/slide5.xml><?xml version="1.0" encoding="utf-8"?>
+<p:sld xmlns:a="http://schemas.openxmlformats.org/drawingml/2006/main" xmlns:r="http://schemas.openxmlformats.org/officeDocument/2006/relationships" xmlns:p="http://schemas.openxmlformats.org/presentationml/2006/main">
+  <p:cSld>
+    <p:spTree>
+      <p:nvGrpSpPr>
+        <p:cNvPr id="1" name=""/>
+        <p:cNvGrpSpPr/>
+        <p:nvPr/>
+      </p:nvGrpSpPr>
+      <p:grpSpPr>
+        <a:xfrm>
+          <a:off x="0" y="0"/>
+          <a:ext cx="0" cy="0"/>
+          <a:chOff x="0" y="0"/>
+          <a:chExt cx="0" cy="0"/>
+        </a:xfrm>
+      </p:grpSpPr>
+      <p:sp>
+        <p:nvSpPr>
+          <p:cNvPr id="2" name="Title 1"/>
+          <p:cNvSpPr>
+            <a:spLocks noGrp="1"/>
+          </p:cNvSpPr>
+          <p:nvPr>
+            <p:ph type="title"/>
+          </p:nvPr>
+        </p:nvSpPr>
+        <p:spPr/>
+        <p:txBody>
+          <a:bodyPr/>
+          <a:lstStyle/>
+          <a:p>
+            <a:pPr lvl="0" indent="0" marL="0">
+              <a:buNone/>
+            </a:pPr>
+            <a:r>
+              <a:rPr/>
+              <a:t>Inheritance: naming the relationship</a:t>
+            </a:r>
+          </a:p>
+        </p:txBody>
+      </p:sp>
+      <p:sp>
+        <p:nvSpPr>
+          <p:cNvPr id="3" name="Content Placeholder 2"/>
+          <p:cNvSpPr>
+            <a:spLocks noGrp="1"/>
+          </p:cNvSpPr>
+          <p:nvPr>
+            <p:ph idx="1"/>
+          </p:nvPr>
+        </p:nvSpPr>
+        <p:spPr/>
+        <p:txBody>
+          <a:bodyPr/>
+          <a:lstStyle/>
+          <a:p>
+            <a:pPr lvl="0" indent="0">
+              <a:buNone/>
+            </a:pPr>
+            <a:r>
+              <a:rPr b="1">
+                <a:solidFill>
+                  <a:srgbClr val="007020"/>
+                </a:solidFill>
+                <a:latin typeface="Courier"/>
+              </a:rPr>
+              <a:t>class</a:t>
+            </a:r>
+            <a:r>
+              <a:rPr>
+                <a:latin typeface="Courier"/>
+              </a:rPr>
+              <a:t> Shape:</a:t>
+            </a:r>
+            <a:br/>
+            <a:r>
+              <a:rPr>
+                <a:latin typeface="Courier"/>
+              </a:rPr>
+              <a:t>    </a:t>
+            </a:r>
+            <a:r>
+              <a:rPr b="1">
+                <a:solidFill>
+                  <a:srgbClr val="007020"/>
+                </a:solidFill>
+                <a:latin typeface="Courier"/>
+              </a:rPr>
+              <a:t>def</a:t>
+            </a:r>
+            <a:r>
+              <a:rPr>
+                <a:latin typeface="Courier"/>
+              </a:rPr>
+              <a:t> area(</a:t>
+            </a:r>
+            <a:r>
+              <a:rPr>
+                <a:solidFill>
+                  <a:srgbClr val="19177C"/>
+                </a:solidFill>
+                <a:latin typeface="Courier"/>
+              </a:rPr>
+              <a:t>self</a:t>
+            </a:r>
+            <a:r>
+              <a:rPr>
+                <a:latin typeface="Courier"/>
+              </a:rPr>
+              <a:t>):</a:t>
+            </a:r>
+            <a:br/>
+            <a:r>
+              <a:rPr>
+                <a:latin typeface="Courier"/>
+              </a:rPr>
+              <a:t>        </a:t>
+            </a:r>
+            <a:r>
+              <a:rPr b="1">
+                <a:solidFill>
+                  <a:srgbClr val="007020"/>
+                </a:solidFill>
+                <a:latin typeface="Courier"/>
+              </a:rPr>
+              <a:t>raise</a:t>
+            </a:r>
+            <a:r>
+              <a:rPr>
+                <a:latin typeface="Courier"/>
+              </a:rPr>
+              <a:t> </a:t>
+            </a:r>
+            <a:r>
+              <a:rPr>
+                <a:solidFill>
+                  <a:srgbClr val="BC7A00"/>
+                </a:solidFill>
+                <a:latin typeface="Courier"/>
+              </a:rPr>
+              <a:t>NotImplementedError</a:t>
+            </a:r>
+            <a:r>
+              <a:rPr>
+                <a:latin typeface="Courier"/>
+              </a:rPr>
+              <a:t>   </a:t>
+            </a:r>
+            <a:r>
+              <a:rPr i="1">
+                <a:solidFill>
+                  <a:srgbClr val="60A0B0"/>
+                </a:solidFill>
+                <a:latin typeface="Courier"/>
+              </a:rPr>
+              <a:t># forces every subclass to override this</a:t>
+            </a:r>
+            <a:br/>
+            <a:br/>
+            <a:r>
+              <a:rPr b="1">
+                <a:solidFill>
+                  <a:srgbClr val="007020"/>
+                </a:solidFill>
+                <a:latin typeface="Courier"/>
+              </a:rPr>
+              <a:t>class</a:t>
+            </a:r>
+            <a:r>
+              <a:rPr>
+                <a:latin typeface="Courier"/>
+              </a:rPr>
+              <a:t> Circle(Shape):                </a:t>
+            </a:r>
+            <a:r>
+              <a:rPr i="1">
+                <a:solidFill>
+                  <a:srgbClr val="60A0B0"/>
+                </a:solidFill>
+                <a:latin typeface="Courier"/>
+              </a:rPr>
+              <a:t># Circle IS-A Shape</a:t>
+            </a:r>
+            <a:br/>
+            <a:r>
+              <a:rPr>
+                <a:latin typeface="Courier"/>
+              </a:rPr>
+              <a:t>    </a:t>
+            </a:r>
+            <a:r>
+              <a:rPr b="1">
+                <a:solidFill>
+                  <a:srgbClr val="007020"/>
+                </a:solidFill>
+                <a:latin typeface="Courier"/>
+              </a:rPr>
+              <a:t>def</a:t>
+            </a:r>
+            <a:r>
+              <a:rPr>
+                <a:latin typeface="Courier"/>
+              </a:rPr>
+              <a:t> </a:t>
+            </a:r>
+            <a:r>
+              <a:rPr>
+                <a:solidFill>
+                  <a:srgbClr val="06287E"/>
+                </a:solidFill>
+                <a:latin typeface="Courier"/>
+              </a:rPr>
+              <a:t>__init__</a:t>
+            </a:r>
+            <a:r>
+              <a:rPr>
+                <a:latin typeface="Courier"/>
+              </a:rPr>
+              <a:t>(</a:t>
+            </a:r>
+            <a:r>
+              <a:rPr>
+                <a:solidFill>
+                  <a:srgbClr val="19177C"/>
+                </a:solidFill>
+                <a:latin typeface="Courier"/>
+              </a:rPr>
+              <a:t>self</a:t>
+            </a:r>
+            <a:r>
+              <a:rPr>
+                <a:latin typeface="Courier"/>
+              </a:rPr>
+              <a:t>, r):</a:t>
+            </a:r>
+            <a:br/>
+            <a:r>
+              <a:rPr>
+                <a:latin typeface="Courier"/>
+              </a:rPr>
+              <a:t>        </a:t>
+            </a:r>
+            <a:r>
+              <a:rPr>
+                <a:solidFill>
+                  <a:srgbClr val="19177C"/>
+                </a:solidFill>
+                <a:latin typeface="Courier"/>
+              </a:rPr>
+              <a:t>self</a:t>
+            </a:r>
+            <a:r>
+              <a:rPr>
+                <a:latin typeface="Courier"/>
+              </a:rPr>
+              <a:t>.r </a:t>
+            </a:r>
+            <a:r>
+              <a:rPr>
+                <a:solidFill>
+                  <a:srgbClr val="666666"/>
+                </a:solidFill>
+                <a:latin typeface="Courier"/>
+              </a:rPr>
+              <a:t>=</a:t>
+            </a:r>
+            <a:r>
+              <a:rPr>
+                <a:latin typeface="Courier"/>
+              </a:rPr>
+              <a:t> r</a:t>
+            </a:r>
+            <a:br/>
+            <a:r>
+              <a:rPr>
+                <a:latin typeface="Courier"/>
+              </a:rPr>
+              <a:t>    </a:t>
+            </a:r>
+            <a:r>
+              <a:rPr b="1">
+                <a:solidFill>
+                  <a:srgbClr val="007020"/>
+                </a:solidFill>
+                <a:latin typeface="Courier"/>
+              </a:rPr>
+              <a:t>def</a:t>
+            </a:r>
+            <a:r>
+              <a:rPr>
+                <a:latin typeface="Courier"/>
+              </a:rPr>
+              <a:t> area(</a:t>
+            </a:r>
+            <a:r>
+              <a:rPr>
+                <a:solidFill>
+                  <a:srgbClr val="19177C"/>
+                </a:solidFill>
+                <a:latin typeface="Courier"/>
+              </a:rPr>
+              <a:t>self</a:t>
+            </a:r>
+            <a:r>
+              <a:rPr>
+                <a:latin typeface="Courier"/>
+              </a:rPr>
+              <a:t>):</a:t>
+            </a:r>
+            <a:br/>
+            <a:r>
+              <a:rPr>
+                <a:latin typeface="Courier"/>
+              </a:rPr>
+              <a:t>        </a:t>
+            </a:r>
+            <a:r>
+              <a:rPr b="1">
+                <a:solidFill>
+                  <a:srgbClr val="007020"/>
+                </a:solidFill>
+                <a:latin typeface="Courier"/>
+              </a:rPr>
+              <a:t>return</a:t>
+            </a:r>
+            <a:r>
+              <a:rPr>
+                <a:latin typeface="Courier"/>
+              </a:rPr>
+              <a:t> </a:t>
+            </a:r>
+            <a:r>
+              <a:rPr>
+                <a:solidFill>
+                  <a:srgbClr val="40A070"/>
+                </a:solidFill>
+                <a:latin typeface="Courier"/>
+              </a:rPr>
+              <a:t>3.14159</a:t>
+            </a:r>
+            <a:r>
+              <a:rPr>
+                <a:latin typeface="Courier"/>
+              </a:rPr>
+              <a:t> </a:t>
+            </a:r>
+            <a:r>
+              <a:rPr>
+                <a:solidFill>
+                  <a:srgbClr val="666666"/>
+                </a:solidFill>
+                <a:latin typeface="Courier"/>
+              </a:rPr>
+              <a:t>*</a:t>
+            </a:r>
+            <a:r>
+              <a:rPr>
+                <a:latin typeface="Courier"/>
+              </a:rPr>
+              <a:t> </a:t>
+            </a:r>
+            <a:r>
+              <a:rPr>
+                <a:solidFill>
+                  <a:srgbClr val="19177C"/>
+                </a:solidFill>
+                <a:latin typeface="Courier"/>
+              </a:rPr>
+              <a:t>self</a:t>
+            </a:r>
+            <a:r>
+              <a:rPr>
+                <a:latin typeface="Courier"/>
+              </a:rPr>
+              <a:t>.r </a:t>
+            </a:r>
+            <a:r>
+              <a:rPr>
+                <a:solidFill>
+                  <a:srgbClr val="666666"/>
+                </a:solidFill>
+                <a:latin typeface="Courier"/>
+              </a:rPr>
+              <a:t>**</a:t>
+            </a:r>
+            <a:r>
+              <a:rPr>
+                <a:latin typeface="Courier"/>
+              </a:rPr>
+              <a:t> </a:t>
+            </a:r>
+            <a:r>
+              <a:rPr>
+                <a:solidFill>
+                  <a:srgbClr val="40A070"/>
+                </a:solidFill>
+                <a:latin typeface="Courier"/>
+              </a:rPr>
+              <a:t>2</a:t>
+            </a:r>
+            <a:br/>
+            <a:br/>
+            <a:r>
+              <a:rPr b="1">
+                <a:solidFill>
+                  <a:srgbClr val="007020"/>
+                </a:solidFill>
+                <a:latin typeface="Courier"/>
+              </a:rPr>
+              <a:t>class</a:t>
+            </a:r>
+            <a:r>
+              <a:rPr>
+                <a:latin typeface="Courier"/>
+              </a:rPr>
+              <a:t> Square(Shape):                </a:t>
+            </a:r>
+            <a:r>
+              <a:rPr i="1">
+                <a:solidFill>
+                  <a:srgbClr val="60A0B0"/>
+                </a:solidFill>
+                <a:latin typeface="Courier"/>
+              </a:rPr>
+              <a:t># Square IS-A Shape</a:t>
+            </a:r>
+            <a:br/>
+            <a:r>
+              <a:rPr>
+                <a:latin typeface="Courier"/>
+              </a:rPr>
+              <a:t>    </a:t>
+            </a:r>
+            <a:r>
+              <a:rPr b="1">
+                <a:solidFill>
+                  <a:srgbClr val="007020"/>
+                </a:solidFill>
+                <a:latin typeface="Courier"/>
+              </a:rPr>
+              <a:t>def</a:t>
+            </a:r>
+            <a:r>
+              <a:rPr>
+                <a:latin typeface="Courier"/>
+              </a:rPr>
+              <a:t> </a:t>
+            </a:r>
+            <a:r>
+              <a:rPr>
+                <a:solidFill>
+                  <a:srgbClr val="06287E"/>
+                </a:solidFill>
+                <a:latin typeface="Courier"/>
+              </a:rPr>
+              <a:t>__init__</a:t>
+            </a:r>
+            <a:r>
+              <a:rPr>
+                <a:latin typeface="Courier"/>
+              </a:rPr>
+              <a:t>(</a:t>
+            </a:r>
+            <a:r>
+              <a:rPr>
+                <a:solidFill>
+                  <a:srgbClr val="19177C"/>
+                </a:solidFill>
+                <a:latin typeface="Courier"/>
+              </a:rPr>
+              <a:t>self</a:t>
+            </a:r>
+            <a:r>
+              <a:rPr>
+                <a:latin typeface="Courier"/>
+              </a:rPr>
+              <a:t>, s):</a:t>
+            </a:r>
+            <a:br/>
+            <a:r>
+              <a:rPr>
+                <a:latin typeface="Courier"/>
+              </a:rPr>
+              <a:t>        </a:t>
+            </a:r>
+            <a:r>
+              <a:rPr>
+                <a:solidFill>
+                  <a:srgbClr val="19177C"/>
+                </a:solidFill>
+                <a:latin typeface="Courier"/>
+              </a:rPr>
+              <a:t>self</a:t>
+            </a:r>
+            <a:r>
+              <a:rPr>
+                <a:latin typeface="Courier"/>
+              </a:rPr>
+              <a:t>.s </a:t>
+            </a:r>
+            <a:r>
+              <a:rPr>
+                <a:solidFill>
+                  <a:srgbClr val="666666"/>
+                </a:solidFill>
+                <a:latin typeface="Courier"/>
+              </a:rPr>
+              <a:t>=</a:t>
+            </a:r>
+            <a:r>
+              <a:rPr>
+                <a:latin typeface="Courier"/>
+              </a:rPr>
+              <a:t> s</a:t>
+            </a:r>
+            <a:br/>
+            <a:r>
+              <a:rPr>
+                <a:latin typeface="Courier"/>
+              </a:rPr>
+              <a:t>    </a:t>
+            </a:r>
+            <a:r>
+              <a:rPr b="1">
+                <a:solidFill>
+                  <a:srgbClr val="007020"/>
+                </a:solidFill>
+                <a:latin typeface="Courier"/>
+              </a:rPr>
+              <a:t>def</a:t>
+            </a:r>
+            <a:r>
+              <a:rPr>
+                <a:latin typeface="Courier"/>
+              </a:rPr>
+              <a:t> area(</a:t>
+            </a:r>
+            <a:r>
+              <a:rPr>
+                <a:solidFill>
+                  <a:srgbClr val="19177C"/>
+                </a:solidFill>
+                <a:latin typeface="Courier"/>
+              </a:rPr>
+              <a:t>self</a:t>
+            </a:r>
+            <a:r>
+              <a:rPr>
+                <a:latin typeface="Courier"/>
+              </a:rPr>
+              <a:t>):</a:t>
+            </a:r>
+            <a:br/>
+            <a:r>
+              <a:rPr>
+                <a:latin typeface="Courier"/>
+              </a:rPr>
+              <a:t>        </a:t>
+            </a:r>
+            <a:r>
+              <a:rPr b="1">
+                <a:solidFill>
+                  <a:srgbClr val="007020"/>
+                </a:solidFill>
+                <a:latin typeface="Courier"/>
+              </a:rPr>
+              <a:t>return</a:t>
+            </a:r>
+            <a:r>
+              <a:rPr>
+                <a:latin typeface="Courier"/>
+              </a:rPr>
+              <a:t> </a:t>
+            </a:r>
+            <a:r>
+              <a:rPr>
+                <a:solidFill>
+                  <a:srgbClr val="19177C"/>
+                </a:solidFill>
+                <a:latin typeface="Courier"/>
+              </a:rPr>
+              <a:t>self</a:t>
+            </a:r>
+            <a:r>
+              <a:rPr>
+                <a:latin typeface="Courier"/>
+              </a:rPr>
+              <a:t>.s </a:t>
+            </a:r>
+            <a:r>
+              <a:rPr>
+                <a:solidFill>
+                  <a:srgbClr val="666666"/>
+                </a:solidFill>
+                <a:latin typeface="Courier"/>
+              </a:rPr>
+              <a:t>**</a:t>
+            </a:r>
+            <a:r>
+              <a:rPr>
+                <a:latin typeface="Courier"/>
+              </a:rPr>
+              <a:t> </a:t>
+            </a:r>
+            <a:r>
+              <a:rPr>
+                <a:solidFill>
+                  <a:srgbClr val="40A070"/>
+                </a:solidFill>
+                <a:latin typeface="Courier"/>
+              </a:rPr>
+              <a:t>2</a:t>
+            </a:r>
+          </a:p>
+        </p:txBody>
+      </p:sp>
+    </p:spTree>
+  </p:cSld>
+</p:sld>
+</file>
+
+<file path=ppt/slides/slide6.xml><?xml version="1.0" encoding="utf-8"?>
 <p:sld xmlns:a="http://schemas.openxmlformats.org/drawingml/2006/main" xmlns:r="http://schemas.openxmlformats.org/officeDocument/2006/relationships" xmlns:p="http://schemas.openxmlformats.org/presentationml/2006/main">
   <p:cSld>
     <p:spTree>
@@ -4420,298 +4844,6 @@
 </p:sld>
 </file>
 
-<file path=ppt/slides/slide5.xml><?xml version="1.0" encoding="utf-8"?>
-<p:sld xmlns:a="http://schemas.openxmlformats.org/drawingml/2006/main" xmlns:r="http://schemas.openxmlformats.org/officeDocument/2006/relationships" xmlns:p="http://schemas.openxmlformats.org/presentationml/2006/main">
-  <p:cSld>
-    <p:spTree>
-      <p:nvGrpSpPr>
-        <p:cNvPr id="1" name=""/>
-        <p:cNvGrpSpPr/>
-        <p:nvPr/>
-      </p:nvGrpSpPr>
-      <p:grpSpPr>
-        <a:xfrm>
-          <a:off x="0" y="0"/>
-          <a:ext cx="0" cy="0"/>
-          <a:chOff x="0" y="0"/>
-          <a:chExt cx="0" cy="0"/>
-        </a:xfrm>
-      </p:grpSpPr>
-      <p:sp>
-        <p:nvSpPr>
-          <p:cNvPr id="2" name="Title 1"/>
-          <p:cNvSpPr>
-            <a:spLocks noGrp="1"/>
-          </p:cNvSpPr>
-          <p:nvPr>
-            <p:ph type="title"/>
-          </p:nvPr>
-        </p:nvSpPr>
-        <p:spPr/>
-        <p:txBody>
-          <a:bodyPr/>
-          <a:lstStyle/>
-          <a:p>
-            <a:pPr lvl="0" indent="0" marL="0">
-              <a:buNone/>
-            </a:pPr>
-            <a:r>
-              <a:rPr/>
-              <a:t>Polymorphism: one call, many behaviors</a:t>
-            </a:r>
-          </a:p>
-        </p:txBody>
-      </p:sp>
-      <p:sp>
-        <p:nvSpPr>
-          <p:cNvPr id="3" name="Content Placeholder 2"/>
-          <p:cNvSpPr>
-            <a:spLocks noGrp="1"/>
-          </p:cNvSpPr>
-          <p:nvPr>
-            <p:ph idx="1"/>
-          </p:nvPr>
-        </p:nvSpPr>
-        <p:spPr/>
-        <p:txBody>
-          <a:bodyPr/>
-          <a:lstStyle/>
-          <a:p>
-            <a:pPr lvl="0" indent="0">
-              <a:buNone/>
-            </a:pPr>
-            <a:r>
-              <a:rPr>
-                <a:latin typeface="Courier"/>
-              </a:rPr>
-              <a:t>shapes </a:t>
-            </a:r>
-            <a:r>
-              <a:rPr>
-                <a:solidFill>
-                  <a:srgbClr val="666666"/>
-                </a:solidFill>
-                <a:latin typeface="Courier"/>
-              </a:rPr>
-              <a:t>=</a:t>
-            </a:r>
-            <a:r>
-              <a:rPr>
-                <a:latin typeface="Courier"/>
-              </a:rPr>
-              <a:t> [Circle(</a:t>
-            </a:r>
-            <a:r>
-              <a:rPr>
-                <a:solidFill>
-                  <a:srgbClr val="40A070"/>
-                </a:solidFill>
-                <a:latin typeface="Courier"/>
-              </a:rPr>
-              <a:t>2</a:t>
-            </a:r>
-            <a:r>
-              <a:rPr>
-                <a:latin typeface="Courier"/>
-              </a:rPr>
-              <a:t>), Square(</a:t>
-            </a:r>
-            <a:r>
-              <a:rPr>
-                <a:solidFill>
-                  <a:srgbClr val="40A070"/>
-                </a:solidFill>
-                <a:latin typeface="Courier"/>
-              </a:rPr>
-              <a:t>3</a:t>
-            </a:r>
-            <a:r>
-              <a:rPr>
-                <a:latin typeface="Courier"/>
-              </a:rPr>
-              <a:t>), Triangle(</a:t>
-            </a:r>
-            <a:r>
-              <a:rPr>
-                <a:solidFill>
-                  <a:srgbClr val="40A070"/>
-                </a:solidFill>
-                <a:latin typeface="Courier"/>
-              </a:rPr>
-              <a:t>4</a:t>
-            </a:r>
-            <a:r>
-              <a:rPr>
-                <a:latin typeface="Courier"/>
-              </a:rPr>
-              <a:t>, </a:t>
-            </a:r>
-            <a:r>
-              <a:rPr>
-                <a:solidFill>
-                  <a:srgbClr val="40A070"/>
-                </a:solidFill>
-                <a:latin typeface="Courier"/>
-              </a:rPr>
-              <a:t>5</a:t>
-            </a:r>
-            <a:r>
-              <a:rPr>
-                <a:latin typeface="Courier"/>
-              </a:rPr>
-              <a:t>)]</a:t>
-            </a:r>
-            <a:br/>
-            <a:r>
-              <a:rPr b="1">
-                <a:solidFill>
-                  <a:srgbClr val="007020"/>
-                </a:solidFill>
-                <a:latin typeface="Courier"/>
-              </a:rPr>
-              <a:t>for</a:t>
-            </a:r>
-            <a:r>
-              <a:rPr>
-                <a:latin typeface="Courier"/>
-              </a:rPr>
-              <a:t> s </a:t>
-            </a:r>
-            <a:r>
-              <a:rPr b="1">
-                <a:solidFill>
-                  <a:srgbClr val="007020"/>
-                </a:solidFill>
-                <a:latin typeface="Courier"/>
-              </a:rPr>
-              <a:t>in</a:t>
-            </a:r>
-            <a:r>
-              <a:rPr>
-                <a:latin typeface="Courier"/>
-              </a:rPr>
-              <a:t> shapes:</a:t>
-            </a:r>
-            <a:br/>
-            <a:r>
-              <a:rPr>
-                <a:latin typeface="Courier"/>
-              </a:rPr>
-              <a:t>    </a:t>
-            </a:r>
-            <a:r>
-              <a:rPr>
-                <a:solidFill>
-                  <a:srgbClr val="008000"/>
-                </a:solidFill>
-                <a:latin typeface="Courier"/>
-              </a:rPr>
-              <a:t>print</a:t>
-            </a:r>
-            <a:r>
-              <a:rPr>
-                <a:latin typeface="Courier"/>
-              </a:rPr>
-              <a:t>(</a:t>
-            </a:r>
-            <a:r>
-              <a:rPr>
-                <a:solidFill>
-                  <a:srgbClr val="008000"/>
-                </a:solidFill>
-                <a:latin typeface="Courier"/>
-              </a:rPr>
-              <a:t>type</a:t>
-            </a:r>
-            <a:r>
-              <a:rPr>
-                <a:latin typeface="Courier"/>
-              </a:rPr>
-              <a:t>(s).</a:t>
-            </a:r>
-            <a:r>
-              <a:rPr>
-                <a:solidFill>
-                  <a:srgbClr val="19177C"/>
-                </a:solidFill>
-                <a:latin typeface="Courier"/>
-              </a:rPr>
-              <a:t>__name__</a:t>
-            </a:r>
-            <a:r>
-              <a:rPr>
-                <a:latin typeface="Courier"/>
-              </a:rPr>
-              <a:t>, s.area())</a:t>
-            </a:r>
-          </a:p>
-          <a:p>
-            <a:pPr lvl="0" indent="0">
-              <a:buNone/>
-            </a:pPr>
-            <a:r>
-              <a:rPr>
-                <a:latin typeface="Courier"/>
-              </a:rPr>
-              <a:t>Circle 12.566
-Square 9
-Triangle 10.0</a:t>
-            </a:r>
-          </a:p>
-        </p:txBody>
-      </p:sp>
-    </p:spTree>
-  </p:cSld>
-</p:sld>
-</file>
-
-<file path=ppt/slides/slide6.xml><?xml version="1.0" encoding="utf-8"?>
-<p:sld xmlns:a="http://schemas.openxmlformats.org/drawingml/2006/main" xmlns:r="http://schemas.openxmlformats.org/officeDocument/2006/relationships" xmlns:p="http://schemas.openxmlformats.org/presentationml/2006/main">
-  <p:cSld>
-    <p:spTree>
-      <p:nvGrpSpPr>
-        <p:cNvPr id="1" name=""/>
-        <p:cNvGrpSpPr/>
-        <p:nvPr/>
-      </p:nvGrpSpPr>
-      <p:grpSpPr>
-        <a:xfrm>
-          <a:off x="0" y="0"/>
-          <a:ext cx="0" cy="0"/>
-          <a:chOff x="0" y="0"/>
-          <a:chExt cx="0" cy="0"/>
-        </a:xfrm>
-      </p:grpSpPr>
-      <p:sp>
-        <p:nvSpPr>
-          <p:cNvPr id="2" name="Title 1"/>
-          <p:cNvSpPr>
-            <a:spLocks noGrp="1"/>
-          </p:cNvSpPr>
-          <p:nvPr>
-            <p:ph type="title"/>
-          </p:nvPr>
-        </p:nvSpPr>
-        <p:spPr/>
-        <p:txBody>
-          <a:bodyPr/>
-          <a:lstStyle/>
-          <a:p>
-            <a:pPr lvl="0" indent="0" marL="0">
-              <a:buNone/>
-            </a:pPr>
-            <a:r>
-              <a:rPr/>
-              <a:t>Where this pays off later in the course</a:t>
-            </a:r>
-          </a:p>
-        </p:txBody>
-      </p:sp>
-    </p:spTree>
-  </p:cSld>
-</p:sld>
-</file>
-
 <file path=ppt/slides/slide7.xml><?xml version="1.0" encoding="utf-8"?>
 <p:sld xmlns:a="http://schemas.openxmlformats.org/drawingml/2006/main" xmlns:r="http://schemas.openxmlformats.org/officeDocument/2006/relationships" xmlns:p="http://schemas.openxmlformats.org/presentationml/2006/main">
   <p:cSld>
@@ -4749,7 +4881,7 @@
             </a:pPr>
             <a:r>
               <a:rPr/>
-              <a:t>MTech addition — composition vs. inheritance</a:t>
+              <a:t>Polymorphism: one call, many behaviors</a:t>
             </a:r>
           </a:p>
         </p:txBody>
@@ -4773,19 +4905,116 @@
               <a:buNone/>
             </a:pPr>
             <a:r>
+              <a:rPr>
+                <a:latin typeface="Courier"/>
+              </a:rPr>
+              <a:t>shapes </a:t>
+            </a:r>
+            <a:r>
+              <a:rPr>
+                <a:solidFill>
+                  <a:srgbClr val="666666"/>
+                </a:solidFill>
+                <a:latin typeface="Courier"/>
+              </a:rPr>
+              <a:t>=</a:t>
+            </a:r>
+            <a:r>
+              <a:rPr>
+                <a:latin typeface="Courier"/>
+              </a:rPr>
+              <a:t> [Circle(</a:t>
+            </a:r>
+            <a:r>
+              <a:rPr>
+                <a:solidFill>
+                  <a:srgbClr val="40A070"/>
+                </a:solidFill>
+                <a:latin typeface="Courier"/>
+              </a:rPr>
+              <a:t>2</a:t>
+            </a:r>
+            <a:r>
+              <a:rPr>
+                <a:latin typeface="Courier"/>
+              </a:rPr>
+              <a:t>), Square(</a:t>
+            </a:r>
+            <a:r>
+              <a:rPr>
+                <a:solidFill>
+                  <a:srgbClr val="40A070"/>
+                </a:solidFill>
+                <a:latin typeface="Courier"/>
+              </a:rPr>
+              <a:t>3</a:t>
+            </a:r>
+            <a:r>
+              <a:rPr>
+                <a:latin typeface="Courier"/>
+              </a:rPr>
+              <a:t>), Triangle(</a:t>
+            </a:r>
+            <a:r>
+              <a:rPr>
+                <a:solidFill>
+                  <a:srgbClr val="40A070"/>
+                </a:solidFill>
+                <a:latin typeface="Courier"/>
+              </a:rPr>
+              <a:t>4</a:t>
+            </a:r>
+            <a:r>
+              <a:rPr>
+                <a:latin typeface="Courier"/>
+              </a:rPr>
+              <a:t>, </a:t>
+            </a:r>
+            <a:r>
+              <a:rPr>
+                <a:solidFill>
+                  <a:srgbClr val="40A070"/>
+                </a:solidFill>
+                <a:latin typeface="Courier"/>
+              </a:rPr>
+              <a:t>5</a:t>
+            </a:r>
+            <a:r>
+              <a:rPr>
+                <a:latin typeface="Courier"/>
+              </a:rPr>
+              <a:t>)]</a:t>
+            </a:r>
+            <a:br/>
+            <a:r>
               <a:rPr b="1">
                 <a:solidFill>
                   <a:srgbClr val="007020"/>
                 </a:solidFill>
                 <a:latin typeface="Courier"/>
               </a:rPr>
-              <a:t>class</a:t>
-            </a:r>
-            <a:r>
-              <a:rPr>
-                <a:latin typeface="Courier"/>
-              </a:rPr>
-              <a:t> Engine:</a:t>
+              <a:t>for</a:t>
+            </a:r>
+            <a:r>
+              <a:rPr>
+                <a:latin typeface="Courier"/>
+              </a:rPr>
+              <a:t> s </a:t>
+            </a:r>
+            <a:r>
+              <a:rPr b="1">
+                <a:solidFill>
+                  <a:srgbClr val="007020"/>
+                </a:solidFill>
+                <a:latin typeface="Courier"/>
+              </a:rPr>
+              <a:t>in</a:t>
+            </a:r>
+            <a:r>
+              <a:rPr>
+                <a:latin typeface="Courier"/>
+              </a:rPr>
+              <a:t> shapes:</a:t>
             </a:r>
             <a:br/>
             <a:r>
@@ -4795,19 +5024,34 @@
               <a:t>    </a:t>
             </a:r>
             <a:r>
-              <a:rPr b="1">
-                <a:solidFill>
-                  <a:srgbClr val="007020"/>
-                </a:solidFill>
-                <a:latin typeface="Courier"/>
-              </a:rPr>
-              <a:t>def</a:t>
-            </a:r>
-            <a:r>
-              <a:rPr>
-                <a:latin typeface="Courier"/>
-              </a:rPr>
-              <a:t> start(</a:t>
+              <a:rPr>
+                <a:solidFill>
+                  <a:srgbClr val="008000"/>
+                </a:solidFill>
+                <a:latin typeface="Courier"/>
+              </a:rPr>
+              <a:t>print</a:t>
+            </a:r>
+            <a:r>
+              <a:rPr>
+                <a:latin typeface="Courier"/>
+              </a:rPr>
+              <a:t>(</a:t>
+            </a:r>
+            <a:r>
+              <a:rPr>
+                <a:solidFill>
+                  <a:srgbClr val="008000"/>
+                </a:solidFill>
+                <a:latin typeface="Courier"/>
+              </a:rPr>
+              <a:t>type</a:t>
+            </a:r>
+            <a:r>
+              <a:rPr>
+                <a:latin typeface="Courier"/>
+              </a:rPr>
+              <a:t>(s).</a:t>
             </a:r>
             <a:r>
               <a:rPr>
@@ -4816,234 +5060,26 @@
                 </a:solidFill>
                 <a:latin typeface="Courier"/>
               </a:rPr>
-              <a:t>self</a:t>
-            </a:r>
-            <a:r>
-              <a:rPr>
-                <a:latin typeface="Courier"/>
-              </a:rPr>
-              <a:t>):</a:t>
-            </a:r>
-            <a:br/>
-            <a:r>
-              <a:rPr>
-                <a:latin typeface="Courier"/>
-              </a:rPr>
-              <a:t>        </a:t>
-            </a:r>
-            <a:r>
-              <a:rPr b="1">
-                <a:solidFill>
-                  <a:srgbClr val="007020"/>
-                </a:solidFill>
-                <a:latin typeface="Courier"/>
-              </a:rPr>
-              <a:t>return</a:t>
-            </a:r>
-            <a:r>
-              <a:rPr>
-                <a:latin typeface="Courier"/>
-              </a:rPr>
-              <a:t> </a:t>
-            </a:r>
-            <a:r>
-              <a:rPr>
-                <a:solidFill>
-                  <a:srgbClr val="4070A0"/>
-                </a:solidFill>
-                <a:latin typeface="Courier"/>
-              </a:rPr>
-              <a:t>"engine started"</a:t>
-            </a:r>
-            <a:br/>
-            <a:br/>
-            <a:r>
-              <a:rPr b="1">
-                <a:solidFill>
-                  <a:srgbClr val="007020"/>
-                </a:solidFill>
-                <a:latin typeface="Courier"/>
-              </a:rPr>
-              <a:t>class</a:t>
-            </a:r>
-            <a:r>
-              <a:rPr>
-                <a:latin typeface="Courier"/>
-              </a:rPr>
-              <a:t> Car:</a:t>
-            </a:r>
-            <a:br/>
-            <a:r>
-              <a:rPr>
-                <a:latin typeface="Courier"/>
-              </a:rPr>
-              <a:t>    </a:t>
-            </a:r>
-            <a:r>
-              <a:rPr b="1">
-                <a:solidFill>
-                  <a:srgbClr val="007020"/>
-                </a:solidFill>
-                <a:latin typeface="Courier"/>
-              </a:rPr>
-              <a:t>def</a:t>
-            </a:r>
-            <a:r>
-              <a:rPr>
-                <a:latin typeface="Courier"/>
-              </a:rPr>
-              <a:t> </a:t>
-            </a:r>
-            <a:r>
-              <a:rPr>
-                <a:solidFill>
-                  <a:srgbClr val="06287E"/>
-                </a:solidFill>
-                <a:latin typeface="Courier"/>
-              </a:rPr>
-              <a:t>__init__</a:t>
-            </a:r>
-            <a:r>
-              <a:rPr>
-                <a:latin typeface="Courier"/>
-              </a:rPr>
-              <a:t>(</a:t>
-            </a:r>
-            <a:r>
-              <a:rPr>
-                <a:solidFill>
-                  <a:srgbClr val="19177C"/>
-                </a:solidFill>
-                <a:latin typeface="Courier"/>
-              </a:rPr>
-              <a:t>self</a:t>
-            </a:r>
-            <a:r>
-              <a:rPr>
-                <a:latin typeface="Courier"/>
-              </a:rPr>
-              <a:t>):</a:t>
-            </a:r>
-            <a:br/>
-            <a:r>
-              <a:rPr>
-                <a:latin typeface="Courier"/>
-              </a:rPr>
-              <a:t>        </a:t>
-            </a:r>
-            <a:r>
-              <a:rPr>
-                <a:solidFill>
-                  <a:srgbClr val="19177C"/>
-                </a:solidFill>
-                <a:latin typeface="Courier"/>
-              </a:rPr>
-              <a:t>self</a:t>
-            </a:r>
-            <a:r>
-              <a:rPr>
-                <a:latin typeface="Courier"/>
-              </a:rPr>
-              <a:t>.engine </a:t>
-            </a:r>
-            <a:r>
-              <a:rPr>
-                <a:solidFill>
-                  <a:srgbClr val="666666"/>
-                </a:solidFill>
-                <a:latin typeface="Courier"/>
-              </a:rPr>
-              <a:t>=</a:t>
-            </a:r>
-            <a:r>
-              <a:rPr>
-                <a:latin typeface="Courier"/>
-              </a:rPr>
-              <a:t> Engine()   </a:t>
-            </a:r>
-            <a:r>
-              <a:rPr i="1">
-                <a:solidFill>
-                  <a:srgbClr val="60A0B0"/>
-                </a:solidFill>
-                <a:latin typeface="Courier"/>
-              </a:rPr>
-              <a:t># composition: Car HAS an Engine</a:t>
-            </a:r>
-            <a:br/>
-            <a:br/>
-            <a:r>
-              <a:rPr>
-                <a:latin typeface="Courier"/>
-              </a:rPr>
-              <a:t>    </a:t>
-            </a:r>
-            <a:r>
-              <a:rPr b="1">
-                <a:solidFill>
-                  <a:srgbClr val="007020"/>
-                </a:solidFill>
-                <a:latin typeface="Courier"/>
-              </a:rPr>
-              <a:t>def</a:t>
-            </a:r>
-            <a:r>
-              <a:rPr>
-                <a:latin typeface="Courier"/>
-              </a:rPr>
-              <a:t> start(</a:t>
-            </a:r>
-            <a:r>
-              <a:rPr>
-                <a:solidFill>
-                  <a:srgbClr val="19177C"/>
-                </a:solidFill>
-                <a:latin typeface="Courier"/>
-              </a:rPr>
-              <a:t>self</a:t>
-            </a:r>
-            <a:r>
-              <a:rPr>
-                <a:latin typeface="Courier"/>
-              </a:rPr>
-              <a:t>):</a:t>
-            </a:r>
-            <a:br/>
-            <a:r>
-              <a:rPr>
-                <a:latin typeface="Courier"/>
-              </a:rPr>
-              <a:t>        </a:t>
-            </a:r>
-            <a:r>
-              <a:rPr b="1">
-                <a:solidFill>
-                  <a:srgbClr val="007020"/>
-                </a:solidFill>
-                <a:latin typeface="Courier"/>
-              </a:rPr>
-              <a:t>return</a:t>
-            </a:r>
-            <a:r>
-              <a:rPr>
-                <a:latin typeface="Courier"/>
-              </a:rPr>
-              <a:t> </a:t>
-            </a:r>
-            <a:r>
-              <a:rPr>
-                <a:solidFill>
-                  <a:srgbClr val="19177C"/>
-                </a:solidFill>
-                <a:latin typeface="Courier"/>
-              </a:rPr>
-              <a:t>self</a:t>
-            </a:r>
-            <a:r>
-              <a:rPr>
-                <a:latin typeface="Courier"/>
-              </a:rPr>
-              <a:t>.engine.start()</a:t>
+              <a:t>__name__</a:t>
+            </a:r>
+            <a:r>
+              <a:rPr>
+                <a:latin typeface="Courier"/>
+              </a:rPr>
+              <a:t>, s.area())</a:t>
+            </a:r>
+          </a:p>
+          <a:p>
+            <a:pPr lvl="0" indent="0">
+              <a:buNone/>
+            </a:pPr>
+            <a:r>
+              <a:rPr>
+                <a:latin typeface="Courier"/>
+              </a:rPr>
+              <a:t>Circle 12.566
+Square 9
+Triangle 10.0</a:t>
             </a:r>
           </a:p>
         </p:txBody>
@@ -5090,145 +5126,7 @@
             </a:pPr>
             <a:r>
               <a:rPr/>
-              <a:t>MTech addition — duck typing and ABCs</a:t>
-            </a:r>
-          </a:p>
-        </p:txBody>
-      </p:sp>
-      <p:sp>
-        <p:nvSpPr>
-          <p:cNvPr id="3" name="Content Placeholder 2"/>
-          <p:cNvSpPr>
-            <a:spLocks noGrp="1"/>
-          </p:cNvSpPr>
-          <p:nvPr>
-            <p:ph idx="1"/>
-          </p:nvPr>
-        </p:nvSpPr>
-        <p:spPr/>
-        <p:txBody>
-          <a:bodyPr/>
-          <a:lstStyle/>
-          <a:p>
-            <a:pPr lvl="0" indent="0">
-              <a:buNone/>
-            </a:pPr>
-            <a:r>
-              <a:rPr b="1">
-                <a:solidFill>
-                  <a:srgbClr val="008000"/>
-                </a:solidFill>
-                <a:latin typeface="Courier"/>
-              </a:rPr>
-              <a:t>from</a:t>
-            </a:r>
-            <a:r>
-              <a:rPr>
-                <a:latin typeface="Courier"/>
-              </a:rPr>
-              <a:t> abc </a:t>
-            </a:r>
-            <a:r>
-              <a:rPr b="1">
-                <a:solidFill>
-                  <a:srgbClr val="008000"/>
-                </a:solidFill>
-                <a:latin typeface="Courier"/>
-              </a:rPr>
-              <a:t>import</a:t>
-            </a:r>
-            <a:r>
-              <a:rPr>
-                <a:latin typeface="Courier"/>
-              </a:rPr>
-              <a:t> ABC, abstractmethod</a:t>
-            </a:r>
-            <a:br/>
-            <a:br/>
-            <a:r>
-              <a:rPr b="1">
-                <a:solidFill>
-                  <a:srgbClr val="007020"/>
-                </a:solidFill>
-                <a:latin typeface="Courier"/>
-              </a:rPr>
-              <a:t>class</a:t>
-            </a:r>
-            <a:r>
-              <a:rPr>
-                <a:latin typeface="Courier"/>
-              </a:rPr>
-              <a:t> Shape(ABC):</a:t>
-            </a:r>
-            <a:br/>
-            <a:r>
-              <a:rPr>
-                <a:latin typeface="Courier"/>
-              </a:rPr>
-              <a:t>    </a:t>
-            </a:r>
-            <a:r>
-              <a:rPr>
-                <a:solidFill>
-                  <a:srgbClr val="7D9029"/>
-                </a:solidFill>
-                <a:latin typeface="Courier"/>
-              </a:rPr>
-              <a:t>@abstractmethod</a:t>
-            </a:r>
-            <a:br/>
-            <a:r>
-              <a:rPr>
-                <a:latin typeface="Courier"/>
-              </a:rPr>
-              <a:t>    </a:t>
-            </a:r>
-            <a:r>
-              <a:rPr b="1">
-                <a:solidFill>
-                  <a:srgbClr val="007020"/>
-                </a:solidFill>
-                <a:latin typeface="Courier"/>
-              </a:rPr>
-              <a:t>def</a:t>
-            </a:r>
-            <a:r>
-              <a:rPr>
-                <a:latin typeface="Courier"/>
-              </a:rPr>
-              <a:t> area(</a:t>
-            </a:r>
-            <a:r>
-              <a:rPr>
-                <a:solidFill>
-                  <a:srgbClr val="19177C"/>
-                </a:solidFill>
-                <a:latin typeface="Courier"/>
-              </a:rPr>
-              <a:t>self</a:t>
-            </a:r>
-            <a:r>
-              <a:rPr>
-                <a:latin typeface="Courier"/>
-              </a:rPr>
-              <a:t>): ...</a:t>
-            </a:r>
-            <a:br/>
-            <a:br/>
-            <a:r>
-              <a:rPr>
-                <a:latin typeface="Courier"/>
-              </a:rPr>
-              <a:t>Shape()          </a:t>
-            </a:r>
-            <a:r>
-              <a:rPr i="1">
-                <a:solidFill>
-                  <a:srgbClr val="60A0B0"/>
-                </a:solidFill>
-                <a:latin typeface="Courier"/>
-              </a:rPr>
-              <a:t># TypeError: can't instantiate abstract class Shape</a:t>
+              <a:t>Where this pays off later in the course</a:t>
             </a:r>
           </a:p>
         </p:txBody>
@@ -5275,7 +5173,301 @@
             </a:pPr>
             <a:r>
               <a:rPr/>
-              <a:t>Exercise</a:t>
+              <a:t>MTech addition — composition vs. inheritance</a:t>
+            </a:r>
+          </a:p>
+        </p:txBody>
+      </p:sp>
+      <p:sp>
+        <p:nvSpPr>
+          <p:cNvPr id="3" name="Content Placeholder 2"/>
+          <p:cNvSpPr>
+            <a:spLocks noGrp="1"/>
+          </p:cNvSpPr>
+          <p:nvPr>
+            <p:ph idx="1"/>
+          </p:nvPr>
+        </p:nvSpPr>
+        <p:spPr/>
+        <p:txBody>
+          <a:bodyPr/>
+          <a:lstStyle/>
+          <a:p>
+            <a:pPr lvl="0" indent="0">
+              <a:buNone/>
+            </a:pPr>
+            <a:r>
+              <a:rPr b="1">
+                <a:solidFill>
+                  <a:srgbClr val="007020"/>
+                </a:solidFill>
+                <a:latin typeface="Courier"/>
+              </a:rPr>
+              <a:t>class</a:t>
+            </a:r>
+            <a:r>
+              <a:rPr>
+                <a:latin typeface="Courier"/>
+              </a:rPr>
+              <a:t> Engine:</a:t>
+            </a:r>
+            <a:br/>
+            <a:r>
+              <a:rPr>
+                <a:latin typeface="Courier"/>
+              </a:rPr>
+              <a:t>    </a:t>
+            </a:r>
+            <a:r>
+              <a:rPr b="1">
+                <a:solidFill>
+                  <a:srgbClr val="007020"/>
+                </a:solidFill>
+                <a:latin typeface="Courier"/>
+              </a:rPr>
+              <a:t>def</a:t>
+            </a:r>
+            <a:r>
+              <a:rPr>
+                <a:latin typeface="Courier"/>
+              </a:rPr>
+              <a:t> start(</a:t>
+            </a:r>
+            <a:r>
+              <a:rPr>
+                <a:solidFill>
+                  <a:srgbClr val="19177C"/>
+                </a:solidFill>
+                <a:latin typeface="Courier"/>
+              </a:rPr>
+              <a:t>self</a:t>
+            </a:r>
+            <a:r>
+              <a:rPr>
+                <a:latin typeface="Courier"/>
+              </a:rPr>
+              <a:t>):</a:t>
+            </a:r>
+            <a:br/>
+            <a:r>
+              <a:rPr>
+                <a:latin typeface="Courier"/>
+              </a:rPr>
+              <a:t>        </a:t>
+            </a:r>
+            <a:r>
+              <a:rPr b="1">
+                <a:solidFill>
+                  <a:srgbClr val="007020"/>
+                </a:solidFill>
+                <a:latin typeface="Courier"/>
+              </a:rPr>
+              <a:t>return</a:t>
+            </a:r>
+            <a:r>
+              <a:rPr>
+                <a:latin typeface="Courier"/>
+              </a:rPr>
+              <a:t> </a:t>
+            </a:r>
+            <a:r>
+              <a:rPr>
+                <a:solidFill>
+                  <a:srgbClr val="4070A0"/>
+                </a:solidFill>
+                <a:latin typeface="Courier"/>
+              </a:rPr>
+              <a:t>"engine started"</a:t>
+            </a:r>
+            <a:br/>
+            <a:br/>
+            <a:r>
+              <a:rPr b="1">
+                <a:solidFill>
+                  <a:srgbClr val="007020"/>
+                </a:solidFill>
+                <a:latin typeface="Courier"/>
+              </a:rPr>
+              <a:t>class</a:t>
+            </a:r>
+            <a:r>
+              <a:rPr>
+                <a:latin typeface="Courier"/>
+              </a:rPr>
+              <a:t> Car:</a:t>
+            </a:r>
+            <a:br/>
+            <a:r>
+              <a:rPr>
+                <a:latin typeface="Courier"/>
+              </a:rPr>
+              <a:t>    </a:t>
+            </a:r>
+            <a:r>
+              <a:rPr b="1">
+                <a:solidFill>
+                  <a:srgbClr val="007020"/>
+                </a:solidFill>
+                <a:latin typeface="Courier"/>
+              </a:rPr>
+              <a:t>def</a:t>
+            </a:r>
+            <a:r>
+              <a:rPr>
+                <a:latin typeface="Courier"/>
+              </a:rPr>
+              <a:t> </a:t>
+            </a:r>
+            <a:r>
+              <a:rPr>
+                <a:solidFill>
+                  <a:srgbClr val="06287E"/>
+                </a:solidFill>
+                <a:latin typeface="Courier"/>
+              </a:rPr>
+              <a:t>__init__</a:t>
+            </a:r>
+            <a:r>
+              <a:rPr>
+                <a:latin typeface="Courier"/>
+              </a:rPr>
+              <a:t>(</a:t>
+            </a:r>
+            <a:r>
+              <a:rPr>
+                <a:solidFill>
+                  <a:srgbClr val="19177C"/>
+                </a:solidFill>
+                <a:latin typeface="Courier"/>
+              </a:rPr>
+              <a:t>self</a:t>
+            </a:r>
+            <a:r>
+              <a:rPr>
+                <a:latin typeface="Courier"/>
+              </a:rPr>
+              <a:t>):</a:t>
+            </a:r>
+            <a:br/>
+            <a:r>
+              <a:rPr>
+                <a:latin typeface="Courier"/>
+              </a:rPr>
+              <a:t>        </a:t>
+            </a:r>
+            <a:r>
+              <a:rPr>
+                <a:solidFill>
+                  <a:srgbClr val="19177C"/>
+                </a:solidFill>
+                <a:latin typeface="Courier"/>
+              </a:rPr>
+              <a:t>self</a:t>
+            </a:r>
+            <a:r>
+              <a:rPr>
+                <a:latin typeface="Courier"/>
+              </a:rPr>
+              <a:t>.engine </a:t>
+            </a:r>
+            <a:r>
+              <a:rPr>
+                <a:solidFill>
+                  <a:srgbClr val="666666"/>
+                </a:solidFill>
+                <a:latin typeface="Courier"/>
+              </a:rPr>
+              <a:t>=</a:t>
+            </a:r>
+            <a:r>
+              <a:rPr>
+                <a:latin typeface="Courier"/>
+              </a:rPr>
+              <a:t> Engine()   </a:t>
+            </a:r>
+            <a:r>
+              <a:rPr i="1">
+                <a:solidFill>
+                  <a:srgbClr val="60A0B0"/>
+                </a:solidFill>
+                <a:latin typeface="Courier"/>
+              </a:rPr>
+              <a:t># composition: Car HAS an Engine</a:t>
+            </a:r>
+            <a:br/>
+            <a:br/>
+            <a:r>
+              <a:rPr>
+                <a:latin typeface="Courier"/>
+              </a:rPr>
+              <a:t>    </a:t>
+            </a:r>
+            <a:r>
+              <a:rPr b="1">
+                <a:solidFill>
+                  <a:srgbClr val="007020"/>
+                </a:solidFill>
+                <a:latin typeface="Courier"/>
+              </a:rPr>
+              <a:t>def</a:t>
+            </a:r>
+            <a:r>
+              <a:rPr>
+                <a:latin typeface="Courier"/>
+              </a:rPr>
+              <a:t> start(</a:t>
+            </a:r>
+            <a:r>
+              <a:rPr>
+                <a:solidFill>
+                  <a:srgbClr val="19177C"/>
+                </a:solidFill>
+                <a:latin typeface="Courier"/>
+              </a:rPr>
+              <a:t>self</a:t>
+            </a:r>
+            <a:r>
+              <a:rPr>
+                <a:latin typeface="Courier"/>
+              </a:rPr>
+              <a:t>):</a:t>
+            </a:r>
+            <a:br/>
+            <a:r>
+              <a:rPr>
+                <a:latin typeface="Courier"/>
+              </a:rPr>
+              <a:t>        </a:t>
+            </a:r>
+            <a:r>
+              <a:rPr b="1">
+                <a:solidFill>
+                  <a:srgbClr val="007020"/>
+                </a:solidFill>
+                <a:latin typeface="Courier"/>
+              </a:rPr>
+              <a:t>return</a:t>
+            </a:r>
+            <a:r>
+              <a:rPr>
+                <a:latin typeface="Courier"/>
+              </a:rPr>
+              <a:t> </a:t>
+            </a:r>
+            <a:r>
+              <a:rPr>
+                <a:solidFill>
+                  <a:srgbClr val="19177C"/>
+                </a:solidFill>
+                <a:latin typeface="Courier"/>
+              </a:rPr>
+              <a:t>self</a:t>
+            </a:r>
+            <a:r>
+              <a:rPr>
+                <a:latin typeface="Courier"/>
+              </a:rPr>
+              <a:t>.engine.start()</a:t>
             </a:r>
           </a:p>
         </p:txBody>
